--- a/Презентации/Анализ клиентской базы.pptx
+++ b/Презентации/Анализ клиентской базы.pptx
@@ -28,7 +28,6 @@
     <p:sldId id="274" r:id="rId22"/>
     <p:sldId id="276" r:id="rId23"/>
     <p:sldId id="277" r:id="rId24"/>
-    <p:sldId id="278" r:id="rId25"/>
   </p:sldIdLst>
   <p:sldSz cx="12192000" cy="6858000"/>
   <p:notesSz cx="6858000" cy="9144000"/>
@@ -185,7 +184,7 @@
           <a:noFill/>
           <a:extLst>
             <a:ext uri="{909E8E84-426E-40dd-AFC4-6F175D3DCCD1}">
-              <a14:hiddenFill xmlns:a14="http://schemas.microsoft.com/office/drawing/2010/main" xmlns="">
+              <a14:hiddenFill xmlns="" xmlns:a14="http://schemas.microsoft.com/office/drawing/2010/main">
                 <a:solidFill>
                   <a:srgbClr val="FFFFFF"/>
                 </a:solidFill>
@@ -245,7 +244,7 @@
             </a:ln>
             <a:extLst>
               <a:ext uri="{91240B29-F687-4f45-9708-019B960494DF}">
-                <a14:hiddenLine xmlns:a14="http://schemas.microsoft.com/office/drawing/2010/main" xmlns="" w="9525">
+                <a14:hiddenLine xmlns="" xmlns:a14="http://schemas.microsoft.com/office/drawing/2010/main" w="9525">
                   <a:solidFill>
                     <a:srgbClr val="000000"/>
                   </a:solidFill>
@@ -335,7 +334,7 @@
             </a:ln>
             <a:extLst>
               <a:ext uri="{91240B29-F687-4f45-9708-019B960494DF}">
-                <a14:hiddenLine xmlns:a14="http://schemas.microsoft.com/office/drawing/2010/main" xmlns="" w="9525">
+                <a14:hiddenLine xmlns="" xmlns:a14="http://schemas.microsoft.com/office/drawing/2010/main" w="9525">
                   <a:solidFill>
                     <a:srgbClr val="000000"/>
                   </a:solidFill>
@@ -425,7 +424,7 @@
             </a:ln>
             <a:extLst>
               <a:ext uri="{91240B29-F687-4f45-9708-019B960494DF}">
-                <a14:hiddenLine xmlns:a14="http://schemas.microsoft.com/office/drawing/2010/main" xmlns="" w="9525">
+                <a14:hiddenLine xmlns="" xmlns:a14="http://schemas.microsoft.com/office/drawing/2010/main" w="9525">
                   <a:solidFill>
                     <a:srgbClr val="000000"/>
                   </a:solidFill>
@@ -459,7 +458,7 @@
             </a:ln>
             <a:extLst>
               <a:ext uri="{91240B29-F687-4f45-9708-019B960494DF}">
-                <a14:hiddenLine xmlns:a14="http://schemas.microsoft.com/office/drawing/2010/main" xmlns="" w="9525">
+                <a14:hiddenLine xmlns="" xmlns:a14="http://schemas.microsoft.com/office/drawing/2010/main" w="9525">
                   <a:solidFill>
                     <a:srgbClr val="000000"/>
                   </a:solidFill>
@@ -549,7 +548,7 @@
             </a:ln>
             <a:extLst>
               <a:ext uri="{91240B29-F687-4f45-9708-019B960494DF}">
-                <a14:hiddenLine xmlns:a14="http://schemas.microsoft.com/office/drawing/2010/main" xmlns="" w="9525">
+                <a14:hiddenLine xmlns="" xmlns:a14="http://schemas.microsoft.com/office/drawing/2010/main" w="9525">
                   <a:solidFill>
                     <a:srgbClr val="000000"/>
                   </a:solidFill>
@@ -611,7 +610,7 @@
             </a:ln>
             <a:extLst>
               <a:ext uri="{91240B29-F687-4f45-9708-019B960494DF}">
-                <a14:hiddenLine xmlns:a14="http://schemas.microsoft.com/office/drawing/2010/main" xmlns="" w="9525">
+                <a14:hiddenLine xmlns="" xmlns:a14="http://schemas.microsoft.com/office/drawing/2010/main" w="9525">
                   <a:solidFill>
                     <a:srgbClr val="000000"/>
                   </a:solidFill>
@@ -673,7 +672,7 @@
             </a:ln>
             <a:extLst>
               <a:ext uri="{91240B29-F687-4f45-9708-019B960494DF}">
-                <a14:hiddenLine xmlns:a14="http://schemas.microsoft.com/office/drawing/2010/main" xmlns="" w="9525">
+                <a14:hiddenLine xmlns="" xmlns:a14="http://schemas.microsoft.com/office/drawing/2010/main" w="9525">
                   <a:solidFill>
                     <a:srgbClr val="000000"/>
                   </a:solidFill>
@@ -763,7 +762,7 @@
             </a:ln>
             <a:extLst>
               <a:ext uri="{91240B29-F687-4f45-9708-019B960494DF}">
-                <a14:hiddenLine xmlns:a14="http://schemas.microsoft.com/office/drawing/2010/main" xmlns="" w="9525">
+                <a14:hiddenLine xmlns="" xmlns:a14="http://schemas.microsoft.com/office/drawing/2010/main" w="9525">
                   <a:solidFill>
                     <a:srgbClr val="000000"/>
                   </a:solidFill>
@@ -825,7 +824,7 @@
             </a:ln>
             <a:extLst>
               <a:ext uri="{91240B29-F687-4f45-9708-019B960494DF}">
-                <a14:hiddenLine xmlns:a14="http://schemas.microsoft.com/office/drawing/2010/main" xmlns="" w="9525">
+                <a14:hiddenLine xmlns="" xmlns:a14="http://schemas.microsoft.com/office/drawing/2010/main" w="9525">
                   <a:solidFill>
                     <a:srgbClr val="000000"/>
                   </a:solidFill>
@@ -887,7 +886,7 @@
             </a:ln>
             <a:extLst>
               <a:ext uri="{91240B29-F687-4f45-9708-019B960494DF}">
-                <a14:hiddenLine xmlns:a14="http://schemas.microsoft.com/office/drawing/2010/main" xmlns="" w="9525">
+                <a14:hiddenLine xmlns="" xmlns:a14="http://schemas.microsoft.com/office/drawing/2010/main" w="9525">
                   <a:solidFill>
                     <a:srgbClr val="000000"/>
                   </a:solidFill>
@@ -977,7 +976,7 @@
             </a:ln>
             <a:extLst>
               <a:ext uri="{91240B29-F687-4f45-9708-019B960494DF}">
-                <a14:hiddenLine xmlns:a14="http://schemas.microsoft.com/office/drawing/2010/main" xmlns="" w="9525">
+                <a14:hiddenLine xmlns="" xmlns:a14="http://schemas.microsoft.com/office/drawing/2010/main" w="9525">
                   <a:solidFill>
                     <a:srgbClr val="000000"/>
                   </a:solidFill>
@@ -1067,7 +1066,7 @@
             </a:ln>
             <a:extLst>
               <a:ext uri="{91240B29-F687-4f45-9708-019B960494DF}">
-                <a14:hiddenLine xmlns:a14="http://schemas.microsoft.com/office/drawing/2010/main" xmlns="" w="9525">
+                <a14:hiddenLine xmlns="" xmlns:a14="http://schemas.microsoft.com/office/drawing/2010/main" w="9525">
                   <a:solidFill>
                     <a:srgbClr val="000000"/>
                   </a:solidFill>
@@ -1129,7 +1128,7 @@
             </a:ln>
             <a:extLst>
               <a:ext uri="{91240B29-F687-4f45-9708-019B960494DF}">
-                <a14:hiddenLine xmlns:a14="http://schemas.microsoft.com/office/drawing/2010/main" xmlns="" w="9525">
+                <a14:hiddenLine xmlns="" xmlns:a14="http://schemas.microsoft.com/office/drawing/2010/main" w="9525">
                   <a:solidFill>
                     <a:srgbClr val="000000"/>
                   </a:solidFill>
@@ -1239,7 +1238,7 @@
             </a:ln>
             <a:extLst>
               <a:ext uri="{91240B29-F687-4f45-9708-019B960494DF}">
-                <a14:hiddenLine xmlns:a14="http://schemas.microsoft.com/office/drawing/2010/main" xmlns="" w="9525">
+                <a14:hiddenLine xmlns="" xmlns:a14="http://schemas.microsoft.com/office/drawing/2010/main" w="9525">
                   <a:solidFill>
                     <a:srgbClr val="000000"/>
                   </a:solidFill>
@@ -1301,7 +1300,7 @@
             </a:ln>
             <a:extLst>
               <a:ext uri="{91240B29-F687-4f45-9708-019B960494DF}">
-                <a14:hiddenLine xmlns:a14="http://schemas.microsoft.com/office/drawing/2010/main" xmlns="" w="9525">
+                <a14:hiddenLine xmlns="" xmlns:a14="http://schemas.microsoft.com/office/drawing/2010/main" w="9525">
                   <a:solidFill>
                     <a:srgbClr val="000000"/>
                   </a:solidFill>
@@ -1391,7 +1390,7 @@
             </a:ln>
             <a:extLst>
               <a:ext uri="{91240B29-F687-4f45-9708-019B960494DF}">
-                <a14:hiddenLine xmlns:a14="http://schemas.microsoft.com/office/drawing/2010/main" xmlns="" w="9525">
+                <a14:hiddenLine xmlns="" xmlns:a14="http://schemas.microsoft.com/office/drawing/2010/main" w="9525">
                   <a:solidFill>
                     <a:srgbClr val="000000"/>
                   </a:solidFill>
@@ -1481,7 +1480,7 @@
             </a:ln>
             <a:extLst>
               <a:ext uri="{91240B29-F687-4f45-9708-019B960494DF}">
-                <a14:hiddenLine xmlns:a14="http://schemas.microsoft.com/office/drawing/2010/main" xmlns="" w="9525">
+                <a14:hiddenLine xmlns="" xmlns:a14="http://schemas.microsoft.com/office/drawing/2010/main" w="9525">
                   <a:solidFill>
                     <a:srgbClr val="000000"/>
                   </a:solidFill>
@@ -1543,7 +1542,7 @@
             </a:ln>
             <a:extLst>
               <a:ext uri="{91240B29-F687-4f45-9708-019B960494DF}">
-                <a14:hiddenLine xmlns:a14="http://schemas.microsoft.com/office/drawing/2010/main" xmlns="" w="9525">
+                <a14:hiddenLine xmlns="" xmlns:a14="http://schemas.microsoft.com/office/drawing/2010/main" w="9525">
                   <a:solidFill>
                     <a:srgbClr val="000000"/>
                   </a:solidFill>
@@ -1633,7 +1632,7 @@
             </a:ln>
             <a:extLst>
               <a:ext uri="{91240B29-F687-4f45-9708-019B960494DF}">
-                <a14:hiddenLine xmlns:a14="http://schemas.microsoft.com/office/drawing/2010/main" xmlns="" w="9525">
+                <a14:hiddenLine xmlns="" xmlns:a14="http://schemas.microsoft.com/office/drawing/2010/main" w="9525">
                   <a:solidFill>
                     <a:srgbClr val="000000"/>
                   </a:solidFill>
@@ -1723,7 +1722,7 @@
             </a:ln>
             <a:extLst>
               <a:ext uri="{91240B29-F687-4f45-9708-019B960494DF}">
-                <a14:hiddenLine xmlns:a14="http://schemas.microsoft.com/office/drawing/2010/main" xmlns="" w="9525">
+                <a14:hiddenLine xmlns="" xmlns:a14="http://schemas.microsoft.com/office/drawing/2010/main" w="9525">
                   <a:solidFill>
                     <a:srgbClr val="000000"/>
                   </a:solidFill>
@@ -1779,7 +1778,7 @@
             </a:ln>
             <a:extLst>
               <a:ext uri="{91240B29-F687-4f45-9708-019B960494DF}">
-                <a14:hiddenLine xmlns:a14="http://schemas.microsoft.com/office/drawing/2010/main" xmlns="" w="9525">
+                <a14:hiddenLine xmlns="" xmlns:a14="http://schemas.microsoft.com/office/drawing/2010/main" w="9525">
                   <a:solidFill>
                     <a:srgbClr val="000000"/>
                   </a:solidFill>
@@ -1869,7 +1868,7 @@
             </a:ln>
             <a:extLst>
               <a:ext uri="{91240B29-F687-4f45-9708-019B960494DF}">
-                <a14:hiddenLine xmlns:a14="http://schemas.microsoft.com/office/drawing/2010/main" xmlns="" w="9525">
+                <a14:hiddenLine xmlns="" xmlns:a14="http://schemas.microsoft.com/office/drawing/2010/main" w="9525">
                   <a:solidFill>
                     <a:srgbClr val="000000"/>
                   </a:solidFill>
@@ -1925,7 +1924,7 @@
             </a:ln>
             <a:extLst>
               <a:ext uri="{91240B29-F687-4f45-9708-019B960494DF}">
-                <a14:hiddenLine xmlns:a14="http://schemas.microsoft.com/office/drawing/2010/main" xmlns="" w="9525">
+                <a14:hiddenLine xmlns="" xmlns:a14="http://schemas.microsoft.com/office/drawing/2010/main" w="9525">
                   <a:solidFill>
                     <a:srgbClr val="000000"/>
                   </a:solidFill>
@@ -2015,7 +2014,7 @@
             </a:ln>
             <a:extLst>
               <a:ext uri="{91240B29-F687-4f45-9708-019B960494DF}">
-                <a14:hiddenLine xmlns:a14="http://schemas.microsoft.com/office/drawing/2010/main" xmlns="" w="9525">
+                <a14:hiddenLine xmlns="" xmlns:a14="http://schemas.microsoft.com/office/drawing/2010/main" w="9525">
                   <a:solidFill>
                     <a:srgbClr val="000000"/>
                   </a:solidFill>
@@ -2083,7 +2082,7 @@
             </a:ln>
             <a:extLst>
               <a:ext uri="{91240B29-F687-4f45-9708-019B960494DF}">
-                <a14:hiddenLine xmlns:a14="http://schemas.microsoft.com/office/drawing/2010/main" xmlns="" w="9525">
+                <a14:hiddenLine xmlns="" xmlns:a14="http://schemas.microsoft.com/office/drawing/2010/main" w="9525">
                   <a:solidFill>
                     <a:srgbClr val="000000"/>
                   </a:solidFill>
@@ -2173,7 +2172,7 @@
             </a:ln>
             <a:extLst>
               <a:ext uri="{91240B29-F687-4f45-9708-019B960494DF}">
-                <a14:hiddenLine xmlns:a14="http://schemas.microsoft.com/office/drawing/2010/main" xmlns="" w="9525">
+                <a14:hiddenLine xmlns="" xmlns:a14="http://schemas.microsoft.com/office/drawing/2010/main" w="9525">
                   <a:solidFill>
                     <a:srgbClr val="000000"/>
                   </a:solidFill>
@@ -2241,7 +2240,7 @@
             </a:ln>
             <a:extLst>
               <a:ext uri="{91240B29-F687-4f45-9708-019B960494DF}">
-                <a14:hiddenLine xmlns:a14="http://schemas.microsoft.com/office/drawing/2010/main" xmlns="" w="9525">
+                <a14:hiddenLine xmlns="" xmlns:a14="http://schemas.microsoft.com/office/drawing/2010/main" w="9525">
                   <a:solidFill>
                     <a:srgbClr val="000000"/>
                   </a:solidFill>
@@ -2331,7 +2330,7 @@
             </a:ln>
             <a:extLst>
               <a:ext uri="{91240B29-F687-4f45-9708-019B960494DF}">
-                <a14:hiddenLine xmlns:a14="http://schemas.microsoft.com/office/drawing/2010/main" xmlns="" w="9525">
+                <a14:hiddenLine xmlns="" xmlns:a14="http://schemas.microsoft.com/office/drawing/2010/main" w="9525">
                   <a:solidFill>
                     <a:srgbClr val="000000"/>
                   </a:solidFill>
@@ -2365,7 +2364,7 @@
             </a:ln>
             <a:extLst>
               <a:ext uri="{91240B29-F687-4f45-9708-019B960494DF}">
-                <a14:hiddenLine xmlns:a14="http://schemas.microsoft.com/office/drawing/2010/main" xmlns="" w="9525">
+                <a14:hiddenLine xmlns="" xmlns:a14="http://schemas.microsoft.com/office/drawing/2010/main" w="9525">
                   <a:solidFill>
                     <a:srgbClr val="000000"/>
                   </a:solidFill>
@@ -2455,7 +2454,7 @@
             </a:ln>
             <a:extLst>
               <a:ext uri="{91240B29-F687-4f45-9708-019B960494DF}">
-                <a14:hiddenLine xmlns:a14="http://schemas.microsoft.com/office/drawing/2010/main" xmlns="" w="9525">
+                <a14:hiddenLine xmlns="" xmlns:a14="http://schemas.microsoft.com/office/drawing/2010/main" w="9525">
                   <a:solidFill>
                     <a:srgbClr val="000000"/>
                   </a:solidFill>
@@ -2517,7 +2516,7 @@
             </a:ln>
             <a:extLst>
               <a:ext uri="{91240B29-F687-4f45-9708-019B960494DF}">
-                <a14:hiddenLine xmlns:a14="http://schemas.microsoft.com/office/drawing/2010/main" xmlns="" w="9525">
+                <a14:hiddenLine xmlns="" xmlns:a14="http://schemas.microsoft.com/office/drawing/2010/main" w="9525">
                   <a:solidFill>
                     <a:srgbClr val="000000"/>
                   </a:solidFill>
@@ -2579,7 +2578,7 @@
             </a:ln>
             <a:extLst>
               <a:ext uri="{91240B29-F687-4f45-9708-019B960494DF}">
-                <a14:hiddenLine xmlns:a14="http://schemas.microsoft.com/office/drawing/2010/main" xmlns="" w="9525">
+                <a14:hiddenLine xmlns="" xmlns:a14="http://schemas.microsoft.com/office/drawing/2010/main" w="9525">
                   <a:solidFill>
                     <a:srgbClr val="000000"/>
                   </a:solidFill>
@@ -2669,7 +2668,7 @@
             </a:ln>
             <a:extLst>
               <a:ext uri="{91240B29-F687-4f45-9708-019B960494DF}">
-                <a14:hiddenLine xmlns:a14="http://schemas.microsoft.com/office/drawing/2010/main" xmlns="" w="9525">
+                <a14:hiddenLine xmlns="" xmlns:a14="http://schemas.microsoft.com/office/drawing/2010/main" w="9525">
                   <a:solidFill>
                     <a:srgbClr val="000000"/>
                   </a:solidFill>
@@ -2737,7 +2736,7 @@
             </a:ln>
             <a:extLst>
               <a:ext uri="{91240B29-F687-4f45-9708-019B960494DF}">
-                <a14:hiddenLine xmlns:a14="http://schemas.microsoft.com/office/drawing/2010/main" xmlns="" w="9525">
+                <a14:hiddenLine xmlns="" xmlns:a14="http://schemas.microsoft.com/office/drawing/2010/main" w="9525">
                   <a:solidFill>
                     <a:srgbClr val="000000"/>
                   </a:solidFill>
@@ -2799,7 +2798,7 @@
             </a:ln>
             <a:extLst>
               <a:ext uri="{91240B29-F687-4f45-9708-019B960494DF}">
-                <a14:hiddenLine xmlns:a14="http://schemas.microsoft.com/office/drawing/2010/main" xmlns="" w="9525">
+                <a14:hiddenLine xmlns="" xmlns:a14="http://schemas.microsoft.com/office/drawing/2010/main" w="9525">
                   <a:solidFill>
                     <a:srgbClr val="000000"/>
                   </a:solidFill>
@@ -2889,7 +2888,7 @@
             </a:ln>
             <a:extLst>
               <a:ext uri="{91240B29-F687-4f45-9708-019B960494DF}">
-                <a14:hiddenLine xmlns:a14="http://schemas.microsoft.com/office/drawing/2010/main" xmlns="" w="9525">
+                <a14:hiddenLine xmlns="" xmlns:a14="http://schemas.microsoft.com/office/drawing/2010/main" w="9525">
                   <a:solidFill>
                     <a:srgbClr val="000000"/>
                   </a:solidFill>
@@ -2951,7 +2950,7 @@
             </a:ln>
             <a:extLst>
               <a:ext uri="{91240B29-F687-4f45-9708-019B960494DF}">
-                <a14:hiddenLine xmlns:a14="http://schemas.microsoft.com/office/drawing/2010/main" xmlns="" w="9525">
+                <a14:hiddenLine xmlns="" xmlns:a14="http://schemas.microsoft.com/office/drawing/2010/main" w="9525">
                   <a:solidFill>
                     <a:srgbClr val="000000"/>
                   </a:solidFill>
@@ -3041,7 +3040,7 @@
             </a:ln>
             <a:extLst>
               <a:ext uri="{91240B29-F687-4f45-9708-019B960494DF}">
-                <a14:hiddenLine xmlns:a14="http://schemas.microsoft.com/office/drawing/2010/main" xmlns="" w="9525">
+                <a14:hiddenLine xmlns="" xmlns:a14="http://schemas.microsoft.com/office/drawing/2010/main" w="9525">
                   <a:solidFill>
                     <a:srgbClr val="000000"/>
                   </a:solidFill>
@@ -3103,7 +3102,7 @@
             </a:ln>
             <a:extLst>
               <a:ext uri="{91240B29-F687-4f45-9708-019B960494DF}">
-                <a14:hiddenLine xmlns:a14="http://schemas.microsoft.com/office/drawing/2010/main" xmlns="" w="9525">
+                <a14:hiddenLine xmlns="" xmlns:a14="http://schemas.microsoft.com/office/drawing/2010/main" w="9525">
                   <a:solidFill>
                     <a:srgbClr val="000000"/>
                   </a:solidFill>
@@ -3193,7 +3192,7 @@
             </a:ln>
             <a:extLst>
               <a:ext uri="{91240B29-F687-4f45-9708-019B960494DF}">
-                <a14:hiddenLine xmlns:a14="http://schemas.microsoft.com/office/drawing/2010/main" xmlns="" w="9525">
+                <a14:hiddenLine xmlns="" xmlns:a14="http://schemas.microsoft.com/office/drawing/2010/main" w="9525">
                   <a:solidFill>
                     <a:srgbClr val="000000"/>
                   </a:solidFill>
@@ -3227,7 +3226,7 @@
             </a:ln>
             <a:extLst>
               <a:ext uri="{91240B29-F687-4f45-9708-019B960494DF}">
-                <a14:hiddenLine xmlns:a14="http://schemas.microsoft.com/office/drawing/2010/main" xmlns="" w="9525">
+                <a14:hiddenLine xmlns="" xmlns:a14="http://schemas.microsoft.com/office/drawing/2010/main" w="9525">
                   <a:solidFill>
                     <a:srgbClr val="000000"/>
                   </a:solidFill>
@@ -3292,7 +3291,7 @@
             </a:ln>
             <a:extLst>
               <a:ext uri="{91240B29-F687-4f45-9708-019B960494DF}">
-                <a14:hiddenLine xmlns:a14="http://schemas.microsoft.com/office/drawing/2010/main" xmlns="" w="9525">
+                <a14:hiddenLine xmlns="" xmlns:a14="http://schemas.microsoft.com/office/drawing/2010/main" w="9525">
                   <a:solidFill>
                     <a:srgbClr val="000000"/>
                   </a:solidFill>
@@ -3382,7 +3381,7 @@
             </a:ln>
             <a:extLst>
               <a:ext uri="{91240B29-F687-4f45-9708-019B960494DF}">
-                <a14:hiddenLine xmlns:a14="http://schemas.microsoft.com/office/drawing/2010/main" xmlns="" w="9525">
+                <a14:hiddenLine xmlns="" xmlns:a14="http://schemas.microsoft.com/office/drawing/2010/main" w="9525">
                   <a:solidFill>
                     <a:srgbClr val="000000"/>
                   </a:solidFill>
@@ -3444,7 +3443,7 @@
             </a:ln>
             <a:extLst>
               <a:ext uri="{91240B29-F687-4f45-9708-019B960494DF}">
-                <a14:hiddenLine xmlns:a14="http://schemas.microsoft.com/office/drawing/2010/main" xmlns="" w="9525">
+                <a14:hiddenLine xmlns="" xmlns:a14="http://schemas.microsoft.com/office/drawing/2010/main" w="9525">
                   <a:solidFill>
                     <a:srgbClr val="000000"/>
                   </a:solidFill>
@@ -3534,7 +3533,7 @@
             </a:ln>
             <a:extLst>
               <a:ext uri="{91240B29-F687-4f45-9708-019B960494DF}">
-                <a14:hiddenLine xmlns:a14="http://schemas.microsoft.com/office/drawing/2010/main" xmlns="" w="9525">
+                <a14:hiddenLine xmlns="" xmlns:a14="http://schemas.microsoft.com/office/drawing/2010/main" w="9525">
                   <a:solidFill>
                     <a:srgbClr val="000000"/>
                   </a:solidFill>
@@ -3624,7 +3623,7 @@
             </a:ln>
             <a:extLst>
               <a:ext uri="{91240B29-F687-4f45-9708-019B960494DF}">
-                <a14:hiddenLine xmlns:a14="http://schemas.microsoft.com/office/drawing/2010/main" xmlns="" w="9525">
+                <a14:hiddenLine xmlns="" xmlns:a14="http://schemas.microsoft.com/office/drawing/2010/main" w="9525">
                   <a:solidFill>
                     <a:srgbClr val="000000"/>
                   </a:solidFill>
@@ -3689,7 +3688,7 @@
             </a:ln>
             <a:extLst>
               <a:ext uri="{91240B29-F687-4f45-9708-019B960494DF}">
-                <a14:hiddenLine xmlns:a14="http://schemas.microsoft.com/office/drawing/2010/main" xmlns="" w="9525">
+                <a14:hiddenLine xmlns="" xmlns:a14="http://schemas.microsoft.com/office/drawing/2010/main" w="9525">
                   <a:solidFill>
                     <a:srgbClr val="000000"/>
                   </a:solidFill>
@@ -3751,7 +3750,7 @@
             </a:ln>
             <a:extLst>
               <a:ext uri="{91240B29-F687-4f45-9708-019B960494DF}">
-                <a14:hiddenLine xmlns:a14="http://schemas.microsoft.com/office/drawing/2010/main" xmlns="" w="9525">
+                <a14:hiddenLine xmlns="" xmlns:a14="http://schemas.microsoft.com/office/drawing/2010/main" w="9525">
                   <a:solidFill>
                     <a:srgbClr val="000000"/>
                   </a:solidFill>
@@ -3841,7 +3840,7 @@
             </a:ln>
             <a:extLst>
               <a:ext uri="{91240B29-F687-4f45-9708-019B960494DF}">
-                <a14:hiddenLine xmlns:a14="http://schemas.microsoft.com/office/drawing/2010/main" xmlns="" w="9525">
+                <a14:hiddenLine xmlns="" xmlns:a14="http://schemas.microsoft.com/office/drawing/2010/main" w="9525">
                   <a:solidFill>
                     <a:srgbClr val="000000"/>
                   </a:solidFill>
@@ -3931,7 +3930,7 @@
             </a:ln>
             <a:extLst>
               <a:ext uri="{91240B29-F687-4f45-9708-019B960494DF}">
-                <a14:hiddenLine xmlns:a14="http://schemas.microsoft.com/office/drawing/2010/main" xmlns="" w="9525">
+                <a14:hiddenLine xmlns="" xmlns:a14="http://schemas.microsoft.com/office/drawing/2010/main" w="9525">
                   <a:solidFill>
                     <a:srgbClr val="000000"/>
                   </a:solidFill>
@@ -3993,7 +3992,7 @@
             </a:ln>
             <a:extLst>
               <a:ext uri="{91240B29-F687-4f45-9708-019B960494DF}">
-                <a14:hiddenLine xmlns:a14="http://schemas.microsoft.com/office/drawing/2010/main" xmlns="" w="9525">
+                <a14:hiddenLine xmlns="" xmlns:a14="http://schemas.microsoft.com/office/drawing/2010/main" w="9525">
                   <a:solidFill>
                     <a:srgbClr val="000000"/>
                   </a:solidFill>
@@ -4113,7 +4112,7 @@
             </a:ln>
             <a:extLst>
               <a:ext uri="{91240B29-F687-4f45-9708-019B960494DF}">
-                <a14:hiddenLine xmlns:a14="http://schemas.microsoft.com/office/drawing/2010/main" xmlns="" w="9525">
+                <a14:hiddenLine xmlns="" xmlns:a14="http://schemas.microsoft.com/office/drawing/2010/main" w="9525">
                   <a:solidFill>
                     <a:srgbClr val="000000"/>
                   </a:solidFill>
@@ -4181,7 +4180,7 @@
             </a:ln>
             <a:extLst>
               <a:ext uri="{91240B29-F687-4f45-9708-019B960494DF}">
-                <a14:hiddenLine xmlns:a14="http://schemas.microsoft.com/office/drawing/2010/main" xmlns="" w="9525">
+                <a14:hiddenLine xmlns="" xmlns:a14="http://schemas.microsoft.com/office/drawing/2010/main" w="9525">
                   <a:solidFill>
                     <a:srgbClr val="000000"/>
                   </a:solidFill>
@@ -4271,7 +4270,7 @@
             </a:ln>
             <a:extLst>
               <a:ext uri="{91240B29-F687-4f45-9708-019B960494DF}">
-                <a14:hiddenLine xmlns:a14="http://schemas.microsoft.com/office/drawing/2010/main" xmlns="" w="9525">
+                <a14:hiddenLine xmlns="" xmlns:a14="http://schemas.microsoft.com/office/drawing/2010/main" w="9525">
                   <a:solidFill>
                     <a:srgbClr val="000000"/>
                   </a:solidFill>
@@ -4411,7 +4410,7 @@
           <a:p>
             <a:fld id="{48A87A34-81AB-432B-8DAE-1953F412C126}" type="datetimeFigureOut">
               <a:rPr lang="en-US" dirty="0"/>
-              <a:t>5/3/2026</a:t>
+              <a:t>5/4/2026</a:t>
             </a:fld>
             <a:endParaRPr lang="en-US" dirty="0"/>
           </a:p>
@@ -4673,7 +4672,7 @@
           <a:p>
             <a:fld id="{48A87A34-81AB-432B-8DAE-1953F412C126}" type="datetimeFigureOut">
               <a:rPr lang="en-US" dirty="0"/>
-              <a:t>5/3/2026</a:t>
+              <a:t>5/4/2026</a:t>
             </a:fld>
             <a:endParaRPr lang="en-US" dirty="0"/>
           </a:p>
@@ -4864,7 +4863,7 @@
           <a:p>
             <a:fld id="{48A87A34-81AB-432B-8DAE-1953F412C126}" type="datetimeFigureOut">
               <a:rPr lang="en-US" dirty="0"/>
-              <a:t>5/3/2026</a:t>
+              <a:t>5/4/2026</a:t>
             </a:fld>
             <a:endParaRPr lang="en-US" dirty="0"/>
           </a:p>
@@ -5122,7 +5121,7 @@
           <a:p>
             <a:fld id="{48A87A34-81AB-432B-8DAE-1953F412C126}" type="datetimeFigureOut">
               <a:rPr lang="en-US" dirty="0"/>
-              <a:t>5/3/2026</a:t>
+              <a:t>5/4/2026</a:t>
             </a:fld>
             <a:endParaRPr lang="en-US" dirty="0"/>
           </a:p>
@@ -5551,7 +5550,7 @@
           <a:p>
             <a:fld id="{48A87A34-81AB-432B-8DAE-1953F412C126}" type="datetimeFigureOut">
               <a:rPr lang="en-US" dirty="0"/>
-              <a:t>5/3/2026</a:t>
+              <a:t>5/4/2026</a:t>
             </a:fld>
             <a:endParaRPr lang="en-US" dirty="0"/>
           </a:p>
@@ -6092,7 +6091,7 @@
           <a:p>
             <a:fld id="{48A87A34-81AB-432B-8DAE-1953F412C126}" type="datetimeFigureOut">
               <a:rPr lang="en-US" dirty="0"/>
-              <a:t>5/3/2026</a:t>
+              <a:t>5/4/2026</a:t>
             </a:fld>
             <a:endParaRPr lang="en-US" dirty="0"/>
           </a:p>
@@ -6807,7 +6806,7 @@
           <a:p>
             <a:fld id="{48A87A34-81AB-432B-8DAE-1953F412C126}" type="datetimeFigureOut">
               <a:rPr lang="en-US" dirty="0"/>
-              <a:t>5/3/2026</a:t>
+              <a:t>5/4/2026</a:t>
             </a:fld>
             <a:endParaRPr lang="en-US" dirty="0"/>
           </a:p>
@@ -6972,7 +6971,7 @@
           <a:p>
             <a:fld id="{48A87A34-81AB-432B-8DAE-1953F412C126}" type="datetimeFigureOut">
               <a:rPr lang="en-US" dirty="0"/>
-              <a:t>5/3/2026</a:t>
+              <a:t>5/4/2026</a:t>
             </a:fld>
             <a:endParaRPr lang="en-US" dirty="0"/>
           </a:p>
@@ -7147,7 +7146,7 @@
           <a:p>
             <a:fld id="{48A87A34-81AB-432B-8DAE-1953F412C126}" type="datetimeFigureOut">
               <a:rPr lang="en-US" dirty="0"/>
-              <a:t>5/3/2026</a:t>
+              <a:t>5/4/2026</a:t>
             </a:fld>
             <a:endParaRPr lang="en-US" dirty="0"/>
           </a:p>
@@ -7312,7 +7311,7 @@
           <a:p>
             <a:fld id="{48A87A34-81AB-432B-8DAE-1953F412C126}" type="datetimeFigureOut">
               <a:rPr lang="en-US" dirty="0"/>
-              <a:t>5/3/2026</a:t>
+              <a:t>5/4/2026</a:t>
             </a:fld>
             <a:endParaRPr lang="en-US" dirty="0"/>
           </a:p>
@@ -7557,7 +7556,7 @@
           <a:p>
             <a:fld id="{48A87A34-81AB-432B-8DAE-1953F412C126}" type="datetimeFigureOut">
               <a:rPr lang="en-US" dirty="0"/>
-              <a:t>5/3/2026</a:t>
+              <a:t>5/4/2026</a:t>
             </a:fld>
             <a:endParaRPr lang="en-US" dirty="0"/>
           </a:p>
@@ -7784,7 +7783,7 @@
           <a:p>
             <a:fld id="{48A87A34-81AB-432B-8DAE-1953F412C126}" type="datetimeFigureOut">
               <a:rPr lang="en-US" dirty="0"/>
-              <a:t>5/3/2026</a:t>
+              <a:t>5/4/2026</a:t>
             </a:fld>
             <a:endParaRPr lang="en-US" dirty="0"/>
           </a:p>
@@ -8160,7 +8159,7 @@
           <a:p>
             <a:fld id="{48A87A34-81AB-432B-8DAE-1953F412C126}" type="datetimeFigureOut">
               <a:rPr lang="en-US" dirty="0"/>
-              <a:t>5/3/2026</a:t>
+              <a:t>5/4/2026</a:t>
             </a:fld>
             <a:endParaRPr lang="en-US" dirty="0"/>
           </a:p>
@@ -8273,7 +8272,7 @@
           <a:p>
             <a:fld id="{48A87A34-81AB-432B-8DAE-1953F412C126}" type="datetimeFigureOut">
               <a:rPr lang="en-US" dirty="0"/>
-              <a:t>5/3/2026</a:t>
+              <a:t>5/4/2026</a:t>
             </a:fld>
             <a:endParaRPr lang="en-US" dirty="0"/>
           </a:p>
@@ -8363,7 +8362,7 @@
           <a:p>
             <a:fld id="{48A87A34-81AB-432B-8DAE-1953F412C126}" type="datetimeFigureOut">
               <a:rPr lang="en-US" dirty="0"/>
-              <a:t>5/3/2026</a:t>
+              <a:t>5/4/2026</a:t>
             </a:fld>
             <a:endParaRPr lang="en-US" dirty="0"/>
           </a:p>
@@ -8607,7 +8606,7 @@
           <a:p>
             <a:fld id="{48A87A34-81AB-432B-8DAE-1953F412C126}" type="datetimeFigureOut">
               <a:rPr lang="en-US" dirty="0"/>
-              <a:t>5/3/2026</a:t>
+              <a:t>5/4/2026</a:t>
             </a:fld>
             <a:endParaRPr lang="en-US" dirty="0"/>
           </a:p>
@@ -8882,7 +8881,7 @@
           <a:p>
             <a:fld id="{48A87A34-81AB-432B-8DAE-1953F412C126}" type="datetimeFigureOut">
               <a:rPr lang="en-US" dirty="0"/>
-              <a:t>5/3/2026</a:t>
+              <a:t>5/4/2026</a:t>
             </a:fld>
             <a:endParaRPr lang="en-US" dirty="0"/>
           </a:p>
@@ -8993,7 +8992,7 @@
           <a:noFill/>
           <a:extLst>
             <a:ext uri="{909E8E84-426E-40dd-AFC4-6F175D3DCCD1}">
-              <a14:hiddenFill xmlns:a14="http://schemas.microsoft.com/office/drawing/2010/main" xmlns="">
+              <a14:hiddenFill xmlns="" xmlns:a14="http://schemas.microsoft.com/office/drawing/2010/main">
                 <a:solidFill>
                   <a:srgbClr val="FFFFFF"/>
                 </a:solidFill>
@@ -9067,7 +9066,7 @@
               </a:ln>
               <a:extLst>
                 <a:ext uri="{91240B29-F687-4f45-9708-019B960494DF}">
-                  <a14:hiddenLine xmlns:a14="http://schemas.microsoft.com/office/drawing/2010/main" xmlns="" w="9525">
+                  <a14:hiddenLine xmlns="" xmlns:a14="http://schemas.microsoft.com/office/drawing/2010/main" w="9525">
                     <a:solidFill>
                       <a:srgbClr val="000000"/>
                     </a:solidFill>
@@ -9157,7 +9156,7 @@
               </a:ln>
               <a:extLst>
                 <a:ext uri="{91240B29-F687-4f45-9708-019B960494DF}">
-                  <a14:hiddenLine xmlns:a14="http://schemas.microsoft.com/office/drawing/2010/main" xmlns="" w="9525">
+                  <a14:hiddenLine xmlns="" xmlns:a14="http://schemas.microsoft.com/office/drawing/2010/main" w="9525">
                     <a:solidFill>
                       <a:srgbClr val="000000"/>
                     </a:solidFill>
@@ -9247,7 +9246,7 @@
               </a:ln>
               <a:extLst>
                 <a:ext uri="{91240B29-F687-4f45-9708-019B960494DF}">
-                  <a14:hiddenLine xmlns:a14="http://schemas.microsoft.com/office/drawing/2010/main" xmlns="" w="9525">
+                  <a14:hiddenLine xmlns="" xmlns:a14="http://schemas.microsoft.com/office/drawing/2010/main" w="9525">
                     <a:solidFill>
                       <a:srgbClr val="000000"/>
                     </a:solidFill>
@@ -9309,7 +9308,7 @@
               </a:ln>
               <a:extLst>
                 <a:ext uri="{91240B29-F687-4f45-9708-019B960494DF}">
-                  <a14:hiddenLine xmlns:a14="http://schemas.microsoft.com/office/drawing/2010/main" xmlns="" w="9525">
+                  <a14:hiddenLine xmlns="" xmlns:a14="http://schemas.microsoft.com/office/drawing/2010/main" w="9525">
                     <a:solidFill>
                       <a:srgbClr val="000000"/>
                     </a:solidFill>
@@ -9399,7 +9398,7 @@
               </a:ln>
               <a:extLst>
                 <a:ext uri="{91240B29-F687-4f45-9708-019B960494DF}">
-                  <a14:hiddenLine xmlns:a14="http://schemas.microsoft.com/office/drawing/2010/main" xmlns="" w="9525">
+                  <a14:hiddenLine xmlns="" xmlns:a14="http://schemas.microsoft.com/office/drawing/2010/main" w="9525">
                     <a:solidFill>
                       <a:srgbClr val="000000"/>
                     </a:solidFill>
@@ -9461,7 +9460,7 @@
               </a:ln>
               <a:extLst>
                 <a:ext uri="{91240B29-F687-4f45-9708-019B960494DF}">
-                  <a14:hiddenLine xmlns:a14="http://schemas.microsoft.com/office/drawing/2010/main" xmlns="" w="9525">
+                  <a14:hiddenLine xmlns="" xmlns:a14="http://schemas.microsoft.com/office/drawing/2010/main" w="9525">
                     <a:solidFill>
                       <a:srgbClr val="000000"/>
                     </a:solidFill>
@@ -9523,7 +9522,7 @@
               </a:ln>
               <a:extLst>
                 <a:ext uri="{91240B29-F687-4f45-9708-019B960494DF}">
-                  <a14:hiddenLine xmlns:a14="http://schemas.microsoft.com/office/drawing/2010/main" xmlns="" w="9525">
+                  <a14:hiddenLine xmlns="" xmlns:a14="http://schemas.microsoft.com/office/drawing/2010/main" w="9525">
                     <a:solidFill>
                       <a:srgbClr val="000000"/>
                     </a:solidFill>
@@ -9613,7 +9612,7 @@
               </a:ln>
               <a:extLst>
                 <a:ext uri="{91240B29-F687-4f45-9708-019B960494DF}">
-                  <a14:hiddenLine xmlns:a14="http://schemas.microsoft.com/office/drawing/2010/main" xmlns="" w="9525">
+                  <a14:hiddenLine xmlns="" xmlns:a14="http://schemas.microsoft.com/office/drawing/2010/main" w="9525">
                     <a:solidFill>
                       <a:srgbClr val="000000"/>
                     </a:solidFill>
@@ -9703,7 +9702,7 @@
               </a:ln>
               <a:extLst>
                 <a:ext uri="{91240B29-F687-4f45-9708-019B960494DF}">
-                  <a14:hiddenLine xmlns:a14="http://schemas.microsoft.com/office/drawing/2010/main" xmlns="" w="9525">
+                  <a14:hiddenLine xmlns="" xmlns:a14="http://schemas.microsoft.com/office/drawing/2010/main" w="9525">
                     <a:solidFill>
                       <a:srgbClr val="000000"/>
                     </a:solidFill>
@@ -9765,7 +9764,7 @@
               </a:ln>
               <a:extLst>
                 <a:ext uri="{91240B29-F687-4f45-9708-019B960494DF}">
-                  <a14:hiddenLine xmlns:a14="http://schemas.microsoft.com/office/drawing/2010/main" xmlns="" w="9525">
+                  <a14:hiddenLine xmlns="" xmlns:a14="http://schemas.microsoft.com/office/drawing/2010/main" w="9525">
                     <a:solidFill>
                       <a:srgbClr val="000000"/>
                     </a:solidFill>
@@ -9875,7 +9874,7 @@
               </a:ln>
               <a:extLst>
                 <a:ext uri="{91240B29-F687-4f45-9708-019B960494DF}">
-                  <a14:hiddenLine xmlns:a14="http://schemas.microsoft.com/office/drawing/2010/main" xmlns="" w="9525">
+                  <a14:hiddenLine xmlns="" xmlns:a14="http://schemas.microsoft.com/office/drawing/2010/main" w="9525">
                     <a:solidFill>
                       <a:srgbClr val="000000"/>
                     </a:solidFill>
@@ -9959,7 +9958,7 @@
               </a:ln>
               <a:extLst>
                 <a:ext uri="{91240B29-F687-4f45-9708-019B960494DF}">
-                  <a14:hiddenLine xmlns:a14="http://schemas.microsoft.com/office/drawing/2010/main" xmlns="" w="9525">
+                  <a14:hiddenLine xmlns="" xmlns:a14="http://schemas.microsoft.com/office/drawing/2010/main" w="9525">
                     <a:solidFill>
                       <a:srgbClr val="000000"/>
                     </a:solidFill>
@@ -10021,7 +10020,7 @@
               </a:ln>
               <a:extLst>
                 <a:ext uri="{91240B29-F687-4f45-9708-019B960494DF}">
-                  <a14:hiddenLine xmlns:a14="http://schemas.microsoft.com/office/drawing/2010/main" xmlns="" w="9525">
+                  <a14:hiddenLine xmlns="" xmlns:a14="http://schemas.microsoft.com/office/drawing/2010/main" w="9525">
                     <a:solidFill>
                       <a:srgbClr val="000000"/>
                     </a:solidFill>
@@ -10083,7 +10082,7 @@
               </a:ln>
               <a:extLst>
                 <a:ext uri="{91240B29-F687-4f45-9708-019B960494DF}">
-                  <a14:hiddenLine xmlns:a14="http://schemas.microsoft.com/office/drawing/2010/main" xmlns="" w="9525">
+                  <a14:hiddenLine xmlns="" xmlns:a14="http://schemas.microsoft.com/office/drawing/2010/main" w="9525">
                     <a:solidFill>
                       <a:srgbClr val="000000"/>
                     </a:solidFill>
@@ -10173,7 +10172,7 @@
               </a:ln>
               <a:extLst>
                 <a:ext uri="{91240B29-F687-4f45-9708-019B960494DF}">
-                  <a14:hiddenLine xmlns:a14="http://schemas.microsoft.com/office/drawing/2010/main" xmlns="" w="9525">
+                  <a14:hiddenLine xmlns="" xmlns:a14="http://schemas.microsoft.com/office/drawing/2010/main" w="9525">
                     <a:solidFill>
                       <a:srgbClr val="000000"/>
                     </a:solidFill>
@@ -10207,7 +10206,7 @@
               </a:ln>
               <a:extLst>
                 <a:ext uri="{91240B29-F687-4f45-9708-019B960494DF}">
-                  <a14:hiddenLine xmlns:a14="http://schemas.microsoft.com/office/drawing/2010/main" xmlns="" w="9525">
+                  <a14:hiddenLine xmlns="" xmlns:a14="http://schemas.microsoft.com/office/drawing/2010/main" w="9525">
                     <a:solidFill>
                       <a:srgbClr val="000000"/>
                     </a:solidFill>
@@ -10272,7 +10271,7 @@
               </a:ln>
               <a:extLst>
                 <a:ext uri="{91240B29-F687-4f45-9708-019B960494DF}">
-                  <a14:hiddenLine xmlns:a14="http://schemas.microsoft.com/office/drawing/2010/main" xmlns="" w="9525">
+                  <a14:hiddenLine xmlns="" xmlns:a14="http://schemas.microsoft.com/office/drawing/2010/main" w="9525">
                     <a:solidFill>
                       <a:srgbClr val="000000"/>
                     </a:solidFill>
@@ -10362,7 +10361,7 @@
               </a:ln>
               <a:extLst>
                 <a:ext uri="{91240B29-F687-4f45-9708-019B960494DF}">
-                  <a14:hiddenLine xmlns:a14="http://schemas.microsoft.com/office/drawing/2010/main" xmlns="" w="9525">
+                  <a14:hiddenLine xmlns="" xmlns:a14="http://schemas.microsoft.com/office/drawing/2010/main" w="9525">
                     <a:solidFill>
                       <a:srgbClr val="000000"/>
                     </a:solidFill>
@@ -10424,7 +10423,7 @@
               </a:ln>
               <a:extLst>
                 <a:ext uri="{91240B29-F687-4f45-9708-019B960494DF}">
-                  <a14:hiddenLine xmlns:a14="http://schemas.microsoft.com/office/drawing/2010/main" xmlns="" w="9525">
+                  <a14:hiddenLine xmlns="" xmlns:a14="http://schemas.microsoft.com/office/drawing/2010/main" w="9525">
                     <a:solidFill>
                       <a:srgbClr val="000000"/>
                     </a:solidFill>
@@ -10514,7 +10513,7 @@
               </a:ln>
               <a:extLst>
                 <a:ext uri="{91240B29-F687-4f45-9708-019B960494DF}">
-                  <a14:hiddenLine xmlns:a14="http://schemas.microsoft.com/office/drawing/2010/main" xmlns="" w="9525">
+                  <a14:hiddenLine xmlns="" xmlns:a14="http://schemas.microsoft.com/office/drawing/2010/main" w="9525">
                     <a:solidFill>
                       <a:srgbClr val="000000"/>
                     </a:solidFill>
@@ -10579,7 +10578,7 @@
               </a:ln>
               <a:extLst>
                 <a:ext uri="{91240B29-F687-4f45-9708-019B960494DF}">
-                  <a14:hiddenLine xmlns:a14="http://schemas.microsoft.com/office/drawing/2010/main" xmlns="" w="9525">
+                  <a14:hiddenLine xmlns="" xmlns:a14="http://schemas.microsoft.com/office/drawing/2010/main" w="9525">
                     <a:solidFill>
                       <a:srgbClr val="000000"/>
                     </a:solidFill>
@@ -10641,7 +10640,7 @@
               </a:ln>
               <a:extLst>
                 <a:ext uri="{91240B29-F687-4f45-9708-019B960494DF}">
-                  <a14:hiddenLine xmlns:a14="http://schemas.microsoft.com/office/drawing/2010/main" xmlns="" w="9525">
+                  <a14:hiddenLine xmlns="" xmlns:a14="http://schemas.microsoft.com/office/drawing/2010/main" w="9525">
                     <a:solidFill>
                       <a:srgbClr val="000000"/>
                     </a:solidFill>
@@ -10731,7 +10730,7 @@
               </a:ln>
               <a:extLst>
                 <a:ext uri="{91240B29-F687-4f45-9708-019B960494DF}">
-                  <a14:hiddenLine xmlns:a14="http://schemas.microsoft.com/office/drawing/2010/main" xmlns="" w="9525">
+                  <a14:hiddenLine xmlns="" xmlns:a14="http://schemas.microsoft.com/office/drawing/2010/main" w="9525">
                     <a:solidFill>
                       <a:srgbClr val="000000"/>
                     </a:solidFill>
@@ -10821,7 +10820,7 @@
               </a:ln>
               <a:extLst>
                 <a:ext uri="{91240B29-F687-4f45-9708-019B960494DF}">
-                  <a14:hiddenLine xmlns:a14="http://schemas.microsoft.com/office/drawing/2010/main" xmlns="" w="9525">
+                  <a14:hiddenLine xmlns="" xmlns:a14="http://schemas.microsoft.com/office/drawing/2010/main" w="9525">
                     <a:solidFill>
                       <a:srgbClr val="000000"/>
                     </a:solidFill>
@@ -10886,7 +10885,7 @@
               </a:ln>
               <a:extLst>
                 <a:ext uri="{91240B29-F687-4f45-9708-019B960494DF}">
-                  <a14:hiddenLine xmlns:a14="http://schemas.microsoft.com/office/drawing/2010/main" xmlns="" w="9525">
+                  <a14:hiddenLine xmlns="" xmlns:a14="http://schemas.microsoft.com/office/drawing/2010/main" w="9525">
                     <a:solidFill>
                       <a:srgbClr val="000000"/>
                     </a:solidFill>
@@ -11006,7 +11005,7 @@
               </a:ln>
               <a:extLst>
                 <a:ext uri="{91240B29-F687-4f45-9708-019B960494DF}">
-                  <a14:hiddenLine xmlns:a14="http://schemas.microsoft.com/office/drawing/2010/main" xmlns="" w="9525">
+                  <a14:hiddenLine xmlns="" xmlns:a14="http://schemas.microsoft.com/office/drawing/2010/main" w="9525">
                     <a:solidFill>
                       <a:srgbClr val="000000"/>
                     </a:solidFill>
@@ -11104,7 +11103,7 @@
               </a:ln>
               <a:extLst>
                 <a:ext uri="{91240B29-F687-4f45-9708-019B960494DF}">
-                  <a14:hiddenLine xmlns:a14="http://schemas.microsoft.com/office/drawing/2010/main" xmlns="" w="9525">
+                  <a14:hiddenLine xmlns="" xmlns:a14="http://schemas.microsoft.com/office/drawing/2010/main" w="9525">
                     <a:solidFill>
                       <a:srgbClr val="000000"/>
                     </a:solidFill>
@@ -11219,7 +11218,7 @@
               </a:ln>
               <a:extLst>
                 <a:ext uri="{91240B29-F687-4f45-9708-019B960494DF}">
-                  <a14:hiddenLine xmlns:a14="http://schemas.microsoft.com/office/drawing/2010/main" xmlns="" w="9525">
+                  <a14:hiddenLine xmlns="" xmlns:a14="http://schemas.microsoft.com/office/drawing/2010/main" w="9525">
                     <a:solidFill>
                       <a:srgbClr val="000000"/>
                     </a:solidFill>
@@ -11309,7 +11308,7 @@
               </a:ln>
               <a:extLst>
                 <a:ext uri="{91240B29-F687-4f45-9708-019B960494DF}">
-                  <a14:hiddenLine xmlns:a14="http://schemas.microsoft.com/office/drawing/2010/main" xmlns="" w="9525">
+                  <a14:hiddenLine xmlns="" xmlns:a14="http://schemas.microsoft.com/office/drawing/2010/main" w="9525">
                     <a:solidFill>
                       <a:srgbClr val="000000"/>
                     </a:solidFill>
@@ -11374,7 +11373,7 @@
               </a:ln>
               <a:extLst>
                 <a:ext uri="{91240B29-F687-4f45-9708-019B960494DF}">
-                  <a14:hiddenLine xmlns:a14="http://schemas.microsoft.com/office/drawing/2010/main" xmlns="" w="9525">
+                  <a14:hiddenLine xmlns="" xmlns:a14="http://schemas.microsoft.com/office/drawing/2010/main" w="9525">
                     <a:solidFill>
                       <a:srgbClr val="000000"/>
                     </a:solidFill>
@@ -11464,7 +11463,7 @@
               </a:ln>
               <a:extLst>
                 <a:ext uri="{91240B29-F687-4f45-9708-019B960494DF}">
-                  <a14:hiddenLine xmlns:a14="http://schemas.microsoft.com/office/drawing/2010/main" xmlns="" w="9525">
+                  <a14:hiddenLine xmlns="" xmlns:a14="http://schemas.microsoft.com/office/drawing/2010/main" w="9525">
                     <a:solidFill>
                       <a:srgbClr val="000000"/>
                     </a:solidFill>
@@ -11532,7 +11531,7 @@
               </a:ln>
               <a:extLst>
                 <a:ext uri="{91240B29-F687-4f45-9708-019B960494DF}">
-                  <a14:hiddenLine xmlns:a14="http://schemas.microsoft.com/office/drawing/2010/main" xmlns="" w="9525">
+                  <a14:hiddenLine xmlns="" xmlns:a14="http://schemas.microsoft.com/office/drawing/2010/main" w="9525">
                     <a:solidFill>
                       <a:srgbClr val="000000"/>
                     </a:solidFill>
@@ -11622,7 +11621,7 @@
               </a:ln>
               <a:extLst>
                 <a:ext uri="{91240B29-F687-4f45-9708-019B960494DF}">
-                  <a14:hiddenLine xmlns:a14="http://schemas.microsoft.com/office/drawing/2010/main" xmlns="" w="9525">
+                  <a14:hiddenLine xmlns="" xmlns:a14="http://schemas.microsoft.com/office/drawing/2010/main" w="9525">
                     <a:solidFill>
                       <a:srgbClr val="000000"/>
                     </a:solidFill>
@@ -11690,7 +11689,7 @@
               </a:ln>
               <a:extLst>
                 <a:ext uri="{91240B29-F687-4f45-9708-019B960494DF}">
-                  <a14:hiddenLine xmlns:a14="http://schemas.microsoft.com/office/drawing/2010/main" xmlns="" w="9525">
+                  <a14:hiddenLine xmlns="" xmlns:a14="http://schemas.microsoft.com/office/drawing/2010/main" w="9525">
                     <a:solidFill>
                       <a:srgbClr val="000000"/>
                     </a:solidFill>
@@ -11780,7 +11779,7 @@
               </a:ln>
               <a:extLst>
                 <a:ext uri="{91240B29-F687-4f45-9708-019B960494DF}">
-                  <a14:hiddenLine xmlns:a14="http://schemas.microsoft.com/office/drawing/2010/main" xmlns="" w="9525">
+                  <a14:hiddenLine xmlns="" xmlns:a14="http://schemas.microsoft.com/office/drawing/2010/main" w="9525">
                     <a:solidFill>
                       <a:srgbClr val="000000"/>
                     </a:solidFill>
@@ -11814,7 +11813,7 @@
               </a:ln>
               <a:extLst>
                 <a:ext uri="{91240B29-F687-4f45-9708-019B960494DF}">
-                  <a14:hiddenLine xmlns:a14="http://schemas.microsoft.com/office/drawing/2010/main" xmlns="" w="9525">
+                  <a14:hiddenLine xmlns="" xmlns:a14="http://schemas.microsoft.com/office/drawing/2010/main" w="9525">
                     <a:solidFill>
                       <a:srgbClr val="000000"/>
                     </a:solidFill>
@@ -11955,7 +11954,7 @@
             <a:fld id="{48A87A34-81AB-432B-8DAE-1953F412C126}" type="datetimeFigureOut">
               <a:rPr lang="en-US" dirty="0"/>
               <a:pPr/>
-              <a:t>5/3/2026</a:t>
+              <a:t>5/4/2026</a:t>
             </a:fld>
             <a:endParaRPr lang="en-US" dirty="0"/>
           </a:p>
@@ -12376,7 +12375,7 @@
           <p:cNvPr id="2" name="Заголовок 1">
             <a:extLst>
               <a:ext uri="{FF2B5EF4-FFF2-40B4-BE49-F238E27FC236}">
-                <a16:creationId xmlns="" xmlns:a16="http://schemas.microsoft.com/office/drawing/2014/main" id="{66474CCB-FAC8-2251-7C09-72612271F472}"/>
+                <a16:creationId xmlns:a16="http://schemas.microsoft.com/office/drawing/2014/main" id="{66474CCB-FAC8-2251-7C09-72612271F472}"/>
               </a:ext>
             </a:extLst>
           </p:cNvPr>
@@ -12405,7 +12404,7 @@
           <p:cNvPr id="3" name="Подзаголовок 2">
             <a:extLst>
               <a:ext uri="{FF2B5EF4-FFF2-40B4-BE49-F238E27FC236}">
-                <a16:creationId xmlns="" xmlns:a16="http://schemas.microsoft.com/office/drawing/2014/main" id="{A1A84B73-3502-E438-AC63-F38A4E4DBDF2}"/>
+                <a16:creationId xmlns:a16="http://schemas.microsoft.com/office/drawing/2014/main" id="{A1A84B73-3502-E438-AC63-F38A4E4DBDF2}"/>
               </a:ext>
             </a:extLst>
           </p:cNvPr>
@@ -12422,12 +12421,8 @@
           <a:lstStyle/>
           <a:p>
             <a:r>
-              <a:rPr lang="ru-RU" dirty="0" smtClean="0"/>
-              <a:t>Анализ клиентской базы за </a:t>
-            </a:r>
-            <a:r>
               <a:rPr lang="ru-RU" dirty="0"/>
-              <a:t>2023 год</a:t>
+              <a:t>Анализ клиентской базы за 2023 год</a:t>
             </a:r>
           </a:p>
         </p:txBody>
@@ -12487,8 +12482,20 @@
                 <a:tableStyleId>{7DF18680-E054-41AD-8BC1-D1AEF772440D}</a:tableStyleId>
               </a:tblPr>
               <a:tblGrid>
-                <a:gridCol w="660777"/>
-                <a:gridCol w="9153248"/>
+                <a:gridCol w="660777">
+                  <a:extLst>
+                    <a:ext uri="{9D8B030D-6E8A-4147-A177-3AD203B41FA5}">
+                      <a16:colId xmlns:a16="http://schemas.microsoft.com/office/drawing/2014/main" val="20000"/>
+                    </a:ext>
+                  </a:extLst>
+                </a:gridCol>
+                <a:gridCol w="9153248">
+                  <a:extLst>
+                    <a:ext uri="{9D8B030D-6E8A-4147-A177-3AD203B41FA5}">
+                      <a16:colId xmlns:a16="http://schemas.microsoft.com/office/drawing/2014/main" val="20001"/>
+                    </a:ext>
+                  </a:extLst>
+                </a:gridCol>
               </a:tblGrid>
               <a:tr h="326336">
                 <a:tc gridSpan="2">
@@ -12527,6 +12534,11 @@
                   </a:txBody>
                   <a:tcPr/>
                 </a:tc>
+                <a:extLst>
+                  <a:ext uri="{0D108BD9-81ED-4DB2-BD59-A6C34878D82A}">
+                    <a16:rowId xmlns:a16="http://schemas.microsoft.com/office/drawing/2014/main" val="10000"/>
+                  </a:ext>
+                </a:extLst>
               </a:tr>
               <a:tr h="652670">
                 <a:tc>
@@ -12581,6 +12593,11 @@
                   </a:txBody>
                   <a:tcPr marL="68580" marR="68580" marT="0" marB="0"/>
                 </a:tc>
+                <a:extLst>
+                  <a:ext uri="{0D108BD9-81ED-4DB2-BD59-A6C34878D82A}">
+                    <a16:rowId xmlns:a16="http://schemas.microsoft.com/office/drawing/2014/main" val="10001"/>
+                  </a:ext>
+                </a:extLst>
               </a:tr>
               <a:tr h="326336">
                 <a:tc>
@@ -12635,6 +12652,11 @@
                   </a:txBody>
                   <a:tcPr marL="68580" marR="68580" marT="0" marB="0"/>
                 </a:tc>
+                <a:extLst>
+                  <a:ext uri="{0D108BD9-81ED-4DB2-BD59-A6C34878D82A}">
+                    <a16:rowId xmlns:a16="http://schemas.microsoft.com/office/drawing/2014/main" val="10002"/>
+                  </a:ext>
+                </a:extLst>
               </a:tr>
               <a:tr h="326336">
                 <a:tc>
@@ -12689,6 +12711,11 @@
                   </a:txBody>
                   <a:tcPr marL="68580" marR="68580" marT="0" marB="0"/>
                 </a:tc>
+                <a:extLst>
+                  <a:ext uri="{0D108BD9-81ED-4DB2-BD59-A6C34878D82A}">
+                    <a16:rowId xmlns:a16="http://schemas.microsoft.com/office/drawing/2014/main" val="10003"/>
+                  </a:ext>
+                </a:extLst>
               </a:tr>
               <a:tr h="326336">
                 <a:tc>
@@ -12743,6 +12770,11 @@
                   </a:txBody>
                   <a:tcPr marL="68580" marR="68580" marT="0" marB="0"/>
                 </a:tc>
+                <a:extLst>
+                  <a:ext uri="{0D108BD9-81ED-4DB2-BD59-A6C34878D82A}">
+                    <a16:rowId xmlns:a16="http://schemas.microsoft.com/office/drawing/2014/main" val="10004"/>
+                  </a:ext>
+                </a:extLst>
               </a:tr>
               <a:tr h="326336">
                 <a:tc>
@@ -12797,6 +12829,11 @@
                   </a:txBody>
                   <a:tcPr marL="68580" marR="68580" marT="0" marB="0"/>
                 </a:tc>
+                <a:extLst>
+                  <a:ext uri="{0D108BD9-81ED-4DB2-BD59-A6C34878D82A}">
+                    <a16:rowId xmlns:a16="http://schemas.microsoft.com/office/drawing/2014/main" val="10005"/>
+                  </a:ext>
+                </a:extLst>
               </a:tr>
               <a:tr h="326336">
                 <a:tc gridSpan="2">
@@ -12835,6 +12872,11 @@
                   </a:txBody>
                   <a:tcPr/>
                 </a:tc>
+                <a:extLst>
+                  <a:ext uri="{0D108BD9-81ED-4DB2-BD59-A6C34878D82A}">
+                    <a16:rowId xmlns:a16="http://schemas.microsoft.com/office/drawing/2014/main" val="10006"/>
+                  </a:ext>
+                </a:extLst>
               </a:tr>
               <a:tr h="326336">
                 <a:tc>
@@ -12889,6 +12931,11 @@
                   </a:txBody>
                   <a:tcPr marL="68580" marR="68580" marT="0" marB="0"/>
                 </a:tc>
+                <a:extLst>
+                  <a:ext uri="{0D108BD9-81ED-4DB2-BD59-A6C34878D82A}">
+                    <a16:rowId xmlns:a16="http://schemas.microsoft.com/office/drawing/2014/main" val="10007"/>
+                  </a:ext>
+                </a:extLst>
               </a:tr>
               <a:tr h="326336">
                 <a:tc>
@@ -12943,6 +12990,11 @@
                   </a:txBody>
                   <a:tcPr marL="68580" marR="68580" marT="0" marB="0"/>
                 </a:tc>
+                <a:extLst>
+                  <a:ext uri="{0D108BD9-81ED-4DB2-BD59-A6C34878D82A}">
+                    <a16:rowId xmlns:a16="http://schemas.microsoft.com/office/drawing/2014/main" val="10008"/>
+                  </a:ext>
+                </a:extLst>
               </a:tr>
               <a:tr h="326336">
                 <a:tc gridSpan="2">
@@ -12981,6 +13033,11 @@
                   </a:txBody>
                   <a:tcPr/>
                 </a:tc>
+                <a:extLst>
+                  <a:ext uri="{0D108BD9-81ED-4DB2-BD59-A6C34878D82A}">
+                    <a16:rowId xmlns:a16="http://schemas.microsoft.com/office/drawing/2014/main" val="10009"/>
+                  </a:ext>
+                </a:extLst>
               </a:tr>
               <a:tr h="326336">
                 <a:tc>
@@ -13035,6 +13092,11 @@
                   </a:txBody>
                   <a:tcPr marL="68580" marR="68580" marT="0" marB="0"/>
                 </a:tc>
+                <a:extLst>
+                  <a:ext uri="{0D108BD9-81ED-4DB2-BD59-A6C34878D82A}">
+                    <a16:rowId xmlns:a16="http://schemas.microsoft.com/office/drawing/2014/main" val="10010"/>
+                  </a:ext>
+                </a:extLst>
               </a:tr>
               <a:tr h="326336">
                 <a:tc>
@@ -13089,6 +13151,11 @@
                   </a:txBody>
                   <a:tcPr marL="68580" marR="68580" marT="0" marB="0"/>
                 </a:tc>
+                <a:extLst>
+                  <a:ext uri="{0D108BD9-81ED-4DB2-BD59-A6C34878D82A}">
+                    <a16:rowId xmlns:a16="http://schemas.microsoft.com/office/drawing/2014/main" val="10011"/>
+                  </a:ext>
+                </a:extLst>
               </a:tr>
               <a:tr h="326336">
                 <a:tc>
@@ -13149,6 +13216,11 @@
                   </a:txBody>
                   <a:tcPr marL="68580" marR="68580" marT="0" marB="0"/>
                 </a:tc>
+                <a:extLst>
+                  <a:ext uri="{0D108BD9-81ED-4DB2-BD59-A6C34878D82A}">
+                    <a16:rowId xmlns:a16="http://schemas.microsoft.com/office/drawing/2014/main" val="10012"/>
+                  </a:ext>
+                </a:extLst>
               </a:tr>
               <a:tr h="326336">
                 <a:tc>
@@ -13215,6 +13287,11 @@
                   </a:txBody>
                   <a:tcPr marL="68580" marR="68580" marT="0" marB="0"/>
                 </a:tc>
+                <a:extLst>
+                  <a:ext uri="{0D108BD9-81ED-4DB2-BD59-A6C34878D82A}">
+                    <a16:rowId xmlns:a16="http://schemas.microsoft.com/office/drawing/2014/main" val="10013"/>
+                  </a:ext>
+                </a:extLst>
               </a:tr>
               <a:tr h="326336">
                 <a:tc gridSpan="2">
@@ -13253,6 +13330,11 @@
                   </a:txBody>
                   <a:tcPr/>
                 </a:tc>
+                <a:extLst>
+                  <a:ext uri="{0D108BD9-81ED-4DB2-BD59-A6C34878D82A}">
+                    <a16:rowId xmlns:a16="http://schemas.microsoft.com/office/drawing/2014/main" val="10014"/>
+                  </a:ext>
+                </a:extLst>
               </a:tr>
               <a:tr h="326336">
                 <a:tc>
@@ -13307,6 +13389,11 @@
                   </a:txBody>
                   <a:tcPr marL="68580" marR="68580" marT="0" marB="0"/>
                 </a:tc>
+                <a:extLst>
+                  <a:ext uri="{0D108BD9-81ED-4DB2-BD59-A6C34878D82A}">
+                    <a16:rowId xmlns:a16="http://schemas.microsoft.com/office/drawing/2014/main" val="10015"/>
+                  </a:ext>
+                </a:extLst>
               </a:tr>
               <a:tr h="326336">
                 <a:tc>
@@ -13361,6 +13448,11 @@
                   </a:txBody>
                   <a:tcPr marL="68580" marR="68580" marT="0" marB="0"/>
                 </a:tc>
+                <a:extLst>
+                  <a:ext uri="{0D108BD9-81ED-4DB2-BD59-A6C34878D82A}">
+                    <a16:rowId xmlns:a16="http://schemas.microsoft.com/office/drawing/2014/main" val="10016"/>
+                  </a:ext>
+                </a:extLst>
               </a:tr>
               <a:tr h="326336">
                 <a:tc>
@@ -13427,6 +13519,11 @@
                   </a:txBody>
                   <a:tcPr marL="68580" marR="68580" marT="0" marB="0"/>
                 </a:tc>
+                <a:extLst>
+                  <a:ext uri="{0D108BD9-81ED-4DB2-BD59-A6C34878D82A}">
+                    <a16:rowId xmlns:a16="http://schemas.microsoft.com/office/drawing/2014/main" val="10017"/>
+                  </a:ext>
+                </a:extLst>
               </a:tr>
             </a:tbl>
           </a:graphicData>
@@ -13488,19 +13585,15 @@
               <a:buNone/>
             </a:pPr>
             <a:r>
-              <a:rPr lang="ru-RU" dirty="0" smtClean="0"/>
+              <a:rPr lang="ru-RU" dirty="0"/>
               <a:t>По таблице RFM-анализа можно получить дополнительную информацию: </a:t>
             </a:r>
           </a:p>
           <a:p>
             <a:pPr algn="just"/>
             <a:r>
-              <a:rPr lang="ru-RU" dirty="0" smtClean="0"/>
-              <a:t>Активные </a:t>
-            </a:r>
-            <a:r>
               <a:rPr lang="ru-RU" dirty="0"/>
-              <a:t>клиенты </a:t>
+              <a:t>Активные клиенты </a:t>
             </a:r>
             <a:r>
               <a:rPr lang="en-US" dirty="0"/>
@@ -13508,22 +13601,13 @@
             </a:r>
             <a:r>
               <a:rPr lang="ru-RU" dirty="0"/>
-              <a:t>1 (недавно покупающие) составляют 32,2% от общей массы клиентов за 2023 год, что в целом неплохо. На </a:t>
-            </a:r>
-            <a:r>
-              <a:rPr lang="ru-RU" dirty="0" smtClean="0"/>
-              <a:t>карточке указана </a:t>
-            </a:r>
-            <a:r>
-              <a:rPr lang="ru-RU" dirty="0"/>
-              <a:t>цель – достигнуть показателя в 50%. </a:t>
-            </a:r>
-            <a:endParaRPr lang="ru-RU" dirty="0" smtClean="0"/>
+              <a:t>1 (недавно покупающие) составляют 32,2% от общей массы клиентов за 2023 год, что в целом неплохо. На карточке указана цель – достигнуть показателя в 50%. </a:t>
+            </a:r>
           </a:p>
           <a:p>
             <a:pPr algn="just"/>
             <a:r>
-              <a:rPr lang="en-US" dirty="0" smtClean="0"/>
+              <a:rPr lang="en-US" dirty="0"/>
               <a:t>VIP</a:t>
             </a:r>
             <a:r>
@@ -13538,17 +13622,12 @@
               <a:rPr lang="ru-RU" dirty="0"/>
               <a:t>-111 (недавно и часто покупающие на большие суммы) составляют всего 0,1%, на карточке цель – 3%. </a:t>
             </a:r>
-            <a:endParaRPr lang="ru-RU" dirty="0" smtClean="0"/>
           </a:p>
           <a:p>
             <a:pPr algn="just"/>
             <a:r>
-              <a:rPr lang="ru-RU" dirty="0" smtClean="0"/>
-              <a:t>Потерянные </a:t>
-            </a:r>
-            <a:r>
               <a:rPr lang="ru-RU" dirty="0"/>
-              <a:t>клиенты </a:t>
+              <a:t>Потерянные клиенты </a:t>
             </a:r>
             <a:r>
               <a:rPr lang="en-US" dirty="0"/>
@@ -13556,15 +13635,7 @@
             </a:r>
             <a:r>
               <a:rPr lang="ru-RU" dirty="0"/>
-              <a:t> составляют 15,1%, цель снизить </a:t>
-            </a:r>
-            <a:r>
-              <a:rPr lang="ru-RU" dirty="0" smtClean="0"/>
-              <a:t>их </a:t>
-            </a:r>
-            <a:r>
-              <a:rPr lang="ru-RU" dirty="0"/>
-              <a:t>до 5%.</a:t>
+              <a:t> составляют 15,1%, цель снизить их до 5%.</a:t>
             </a:r>
           </a:p>
           <a:p>
@@ -13577,7 +13648,7 @@
             <a:pPr marL="0" lvl="0" indent="0" algn="just">
               <a:buNone/>
             </a:pPr>
-            <a:endParaRPr lang="ru-RU" dirty="0" smtClean="0"/>
+            <a:endParaRPr lang="ru-RU" dirty="0"/>
           </a:p>
         </p:txBody>
       </p:sp>
@@ -13709,28 +13780,8 @@
               <a:buNone/>
             </a:pPr>
             <a:r>
-              <a:rPr lang="ru-RU" dirty="0" smtClean="0"/>
-              <a:t>По таблице RFM-анализа можно получить дополнительную информацию</a:t>
-            </a:r>
-            <a:r>
               <a:rPr lang="ru-RU" dirty="0"/>
-              <a:t> </a:t>
-            </a:r>
-            <a:r>
-              <a:rPr lang="ru-RU" dirty="0" smtClean="0"/>
-              <a:t>- размер </a:t>
-            </a:r>
-            <a:r>
-              <a:rPr lang="ru-RU" dirty="0"/>
-              <a:t>RFM-сегментов за период: </a:t>
-            </a:r>
-            <a:r>
-              <a:rPr lang="ru-RU" dirty="0" smtClean="0"/>
-              <a:t>всего 23 </a:t>
-            </a:r>
-            <a:r>
-              <a:rPr lang="ru-RU" dirty="0"/>
-              <a:t>сегмента, самый массовый сегмент 333 - 130 689 клиентов (15,1% от всех), сегмент </a:t>
+              <a:t>По таблице RFM-анализа можно получить дополнительную информацию - размер RFM-сегментов за период: всего 23 сегмента, самый массовый сегмент 333 - 130 689 клиентов (15,1% от всех), сегмент </a:t>
             </a:r>
             <a:r>
               <a:rPr lang="en-US" dirty="0"/>
@@ -13745,19 +13796,25 @@
             <a:pPr marL="0" indent="0" algn="just">
               <a:buNone/>
             </a:pPr>
-            <a:endParaRPr lang="ru-RU" dirty="0" smtClean="0"/>
+            <a:endParaRPr lang="ru-RU" dirty="0"/>
           </a:p>
           <a:p>
             <a:pPr marL="0" lvl="0" indent="0" algn="just">
               <a:buNone/>
             </a:pPr>
-            <a:endParaRPr lang="ru-RU" dirty="0" smtClean="0"/>
+            <a:endParaRPr lang="ru-RU" dirty="0"/>
           </a:p>
         </p:txBody>
       </p:sp>
       <p:pic>
         <p:nvPicPr>
-          <p:cNvPr id="2" name="Рисунок 1"/>
+          <p:cNvPr id="6" name="Рисунок 5">
+            <a:extLst>
+              <a:ext uri="{FF2B5EF4-FFF2-40B4-BE49-F238E27FC236}">
+                <a16:creationId xmlns:a16="http://schemas.microsoft.com/office/drawing/2014/main" id="{629D6814-7170-46C6-82AF-2547C49CC811}"/>
+              </a:ext>
+            </a:extLst>
+          </p:cNvPr>
           <p:cNvPicPr>
             <a:picLocks noChangeAspect="1"/>
           </p:cNvPicPr>
@@ -13771,8 +13828,8 @@
         </p:blipFill>
         <p:spPr>
           <a:xfrm>
-            <a:off x="2782866" y="2530257"/>
-            <a:ext cx="7029272" cy="3650619"/>
+            <a:off x="1644500" y="2731598"/>
+            <a:ext cx="8903000" cy="2860820"/>
           </a:xfrm>
           <a:prstGeom prst="rect">
             <a:avLst/>
@@ -13835,36 +13892,8 @@
               <a:buNone/>
             </a:pPr>
             <a:r>
-              <a:rPr lang="ru-RU" dirty="0" smtClean="0"/>
-              <a:t>По таблице RFM-анализа можно получить дополнительную информацию</a:t>
-            </a:r>
-            <a:r>
               <a:rPr lang="ru-RU" dirty="0"/>
-              <a:t> </a:t>
-            </a:r>
-            <a:r>
-              <a:rPr lang="ru-RU" dirty="0" smtClean="0"/>
-              <a:t>- деньги </a:t>
-            </a:r>
-            <a:r>
-              <a:rPr lang="ru-RU" dirty="0"/>
-              <a:t>в  RFM-сегментах за период: общая выручка за год </a:t>
-            </a:r>
-            <a:r>
-              <a:rPr lang="ru-RU" dirty="0" smtClean="0"/>
-              <a:t>составляет 1,67 </a:t>
-            </a:r>
-            <a:r>
-              <a:rPr lang="ru-RU" dirty="0"/>
-              <a:t>трлн руб. Больше всего денег приносит сегмент 121. Самый высокий средний чек в сегменте 111, самый низкий средний чек в сегменте 333, 8 сегментов дают 89,2% выручки. Сегмент 333 самый большой по числу </a:t>
-            </a:r>
-            <a:r>
-              <a:rPr lang="ru-RU" dirty="0" smtClean="0"/>
-              <a:t>клиентов, </a:t>
-            </a:r>
-            <a:r>
-              <a:rPr lang="ru-RU" dirty="0"/>
-              <a:t>но дает только 2,1% выручки.</a:t>
+              <a:t>По таблице RFM-анализа можно получить дополнительную информацию - деньги в  RFM-сегментах за период: общая выручка за год составляет 1,67 трлн руб. Больше всего денег приносит сегмент 121. Самый высокий средний чек в сегменте 111, самый низкий средний чек в сегменте 333, 8 сегментов дают 89,2% выручки. Сегмент 333 самый большой по числу клиентов, но дает только 2,1% выручки.</a:t>
             </a:r>
           </a:p>
           <a:p>
@@ -13880,19 +13909,25 @@
             <a:pPr marL="0" indent="0" algn="just">
               <a:buNone/>
             </a:pPr>
-            <a:endParaRPr lang="ru-RU" dirty="0" smtClean="0"/>
+            <a:endParaRPr lang="ru-RU" dirty="0"/>
           </a:p>
           <a:p>
             <a:pPr marL="0" lvl="0" indent="0" algn="just">
               <a:buNone/>
             </a:pPr>
-            <a:endParaRPr lang="ru-RU" dirty="0" smtClean="0"/>
+            <a:endParaRPr lang="ru-RU" dirty="0"/>
           </a:p>
         </p:txBody>
       </p:sp>
       <p:pic>
         <p:nvPicPr>
-          <p:cNvPr id="4" name="Рисунок 3"/>
+          <p:cNvPr id="2" name="Рисунок 1">
+            <a:extLst>
+              <a:ext uri="{FF2B5EF4-FFF2-40B4-BE49-F238E27FC236}">
+                <a16:creationId xmlns:a16="http://schemas.microsoft.com/office/drawing/2014/main" id="{D803C333-C47B-4FA6-8335-22E9BA7DEF33}"/>
+              </a:ext>
+            </a:extLst>
+          </p:cNvPr>
           <p:cNvPicPr>
             <a:picLocks noChangeAspect="1"/>
           </p:cNvPicPr>
@@ -13906,8 +13941,8 @@
         </p:blipFill>
         <p:spPr>
           <a:xfrm>
-            <a:off x="1237729" y="3249200"/>
-            <a:ext cx="9791700" cy="3390900"/>
+            <a:off x="1051270" y="3106485"/>
+            <a:ext cx="10089460" cy="3613729"/>
           </a:xfrm>
           <a:prstGeom prst="rect">
             <a:avLst/>
@@ -13970,12 +14005,8 @@
               <a:buNone/>
             </a:pPr>
             <a:r>
-              <a:rPr lang="ru-RU" dirty="0" smtClean="0"/>
-              <a:t>Воронка </a:t>
-            </a:r>
-            <a:r>
               <a:rPr lang="ru-RU" dirty="0"/>
-              <a:t>покупок за период: LTV-воронка показывает, как клиенты совершают повторные покупки (от 1-й до 12-й).</a:t>
+              <a:t>Воронка покупок за период: LTV-воронка показывает, как клиенты совершают повторные покупки (от 1-й до 12-й).</a:t>
             </a:r>
             <a:r>
               <a:rPr lang="ru-RU" b="1" dirty="0"/>
@@ -13991,11 +14022,7 @@
             </a:r>
             <a:r>
               <a:rPr lang="ru-RU" dirty="0"/>
-              <a:t>Одноразовые (1 покупка) - 31.3%, возвращающиеся (2-4 покупки) - 54.7%, лояльные (5-7 покупок) - 7.0%, супер-лояльные (8+ покупок) - 0.16</a:t>
-            </a:r>
-            <a:r>
-              <a:rPr lang="ru-RU" dirty="0" smtClean="0"/>
-              <a:t>%.</a:t>
+              <a:t>Одноразовые (1 покупка) - 31.3%, возвращающиеся (2-4 покупки) - 54.7%, лояльные (5-7 покупок) - 7.0%, супер-лояльные (8+ покупок) - 0.16%.</a:t>
             </a:r>
           </a:p>
           <a:p>
@@ -14006,13 +14033,13 @@
             <a:pPr marL="0" indent="0" algn="just">
               <a:buNone/>
             </a:pPr>
-            <a:endParaRPr lang="ru-RU" dirty="0" smtClean="0"/>
+            <a:endParaRPr lang="ru-RU" dirty="0"/>
           </a:p>
           <a:p>
             <a:pPr marL="0" lvl="0" indent="0" algn="just">
               <a:buNone/>
             </a:pPr>
-            <a:endParaRPr lang="ru-RU" dirty="0" smtClean="0"/>
+            <a:endParaRPr lang="ru-RU" dirty="0"/>
           </a:p>
         </p:txBody>
       </p:sp>
@@ -14096,26 +14123,9 @@
               <a:buNone/>
             </a:pPr>
             <a:r>
-              <a:rPr lang="ru-RU" dirty="0" smtClean="0"/>
-              <a:t>Количество </a:t>
-            </a:r>
-            <a:r>
               <a:rPr lang="ru-RU" dirty="0"/>
-              <a:t>покупок и конверсия за период: </a:t>
-            </a:r>
-            <a:r>
-              <a:rPr lang="ru-RU" dirty="0" smtClean="0"/>
-              <a:t>конверсия </a:t>
-            </a:r>
-            <a:r>
-              <a:rPr lang="ru-RU" dirty="0"/>
-              <a:t>шага снижается с 68,73% до 10</a:t>
-            </a:r>
-            <a:r>
-              <a:rPr lang="ru-RU" dirty="0" smtClean="0"/>
-              <a:t>%.</a:t>
-            </a:r>
-            <a:endParaRPr lang="ru-RU" dirty="0"/>
+              <a:t>Количество покупок и конверсия за период: конверсия шага снижается с 68,73% до 10%.</a:t>
+            </a:r>
           </a:p>
           <a:p>
             <a:pPr marL="0" indent="0" algn="just">
@@ -14131,44 +14141,23 @@
             </a:r>
             <a:r>
               <a:rPr lang="ru-RU" dirty="0"/>
-              <a:t>/SMS-напоминание через 7–14 дней после первой покупки, программа лояльности «Приведи друга</a:t>
-            </a:r>
-            <a:r>
-              <a:rPr lang="ru-RU" dirty="0" smtClean="0"/>
-              <a:t>»,</a:t>
-            </a:r>
+              <a:t>/SMS-напоминание через 7–14 дней после первой покупки, программа лояльности «Приведи друга», опрос. После 2-й покупки - персональное предложение, накопительная система скидок, автоматическое напоминание «Ваш следующий заказ». После 3-ей покупки эксклюзивные условия, ранний доступ к новинкам, бесплатная доставка на 4-й заказ. Далее VIP-программа для 5+ покупок. Персональный менеджер для 10+ покупок, ежемесячная подписка со скидкой. </a:t>
+            </a:r>
+          </a:p>
+          <a:p>
+            <a:pPr marL="0" indent="0" algn="just">
+              <a:buNone/>
+            </a:pPr>
             <a:r>
               <a:rPr lang="ru-RU" dirty="0"/>
-              <a:t> </a:t>
-            </a:r>
-            <a:r>
-              <a:rPr lang="ru-RU" dirty="0" smtClean="0"/>
-              <a:t>опрос. </a:t>
-            </a:r>
-            <a:r>
-              <a:rPr lang="ru-RU" dirty="0"/>
-              <a:t>После 2-й покупки - персональное предложение, накопительная система скидок, автоматическое напоминание «Ваш следующий заказ». После 3-ей покупки эксклюзивные условия, ранний доступ к новинкам, бесплатная доставка на 4-й заказ. Далее VIP-программа для 5+ покупок. Персональный менеджер для 10+ покупок, ежемесячная подписка со скидкой. </a:t>
-            </a:r>
-            <a:endParaRPr lang="ru-RU" dirty="0" smtClean="0"/>
-          </a:p>
-          <a:p>
-            <a:pPr marL="0" indent="0" algn="just">
+              <a:t>Важно сфокусироваться на удержании клиентов после 1-й и 2-й покупки - здесь теряется больше всего людей. На 8+ покупках ресурсы желательно не тратить.</a:t>
+            </a:r>
+          </a:p>
+          <a:p>
+            <a:pPr marL="0" lvl="0" indent="0" algn="just">
               <a:buNone/>
             </a:pPr>
-            <a:r>
-              <a:rPr lang="ru-RU" dirty="0" smtClean="0"/>
-              <a:t>Важно </a:t>
-            </a:r>
-            <a:r>
-              <a:rPr lang="ru-RU" dirty="0"/>
-              <a:t>сфокусироваться на удержании клиентов после 1-й и 2-й покупки - здесь теряется больше всего людей. На 8+ покупках ресурсы желательно не тратить.</a:t>
-            </a:r>
-          </a:p>
-          <a:p>
-            <a:pPr marL="0" lvl="0" indent="0" algn="just">
-              <a:buNone/>
-            </a:pPr>
-            <a:endParaRPr lang="ru-RU" dirty="0" smtClean="0"/>
+            <a:endParaRPr lang="ru-RU" dirty="0"/>
           </a:p>
         </p:txBody>
       </p:sp>
@@ -14252,11 +14241,11 @@
               <a:buNone/>
             </a:pPr>
             <a:r>
-              <a:rPr lang="ru-RU" dirty="0" err="1" smtClean="0"/>
+              <a:rPr lang="ru-RU" dirty="0" err="1"/>
               <a:t>Monthly</a:t>
             </a:r>
             <a:r>
-              <a:rPr lang="ru-RU" dirty="0" smtClean="0"/>
+              <a:rPr lang="ru-RU" dirty="0"/>
               <a:t> </a:t>
             </a:r>
             <a:r>
@@ -14281,7 +14270,7 @@
             <a:pPr marL="0" lvl="0" indent="0" algn="just">
               <a:buNone/>
             </a:pPr>
-            <a:endParaRPr lang="ru-RU" dirty="0" smtClean="0"/>
+            <a:endParaRPr lang="ru-RU" dirty="0"/>
           </a:p>
         </p:txBody>
       </p:sp>
@@ -14365,16 +14354,8 @@
               <a:buNone/>
             </a:pPr>
             <a:r>
-              <a:rPr lang="ru-RU" dirty="0" smtClean="0"/>
-              <a:t>Анализ </a:t>
-            </a:r>
-            <a:r>
               <a:rPr lang="ru-RU" dirty="0"/>
-              <a:t>топ-5 клиентов по сумме продаж: </a:t>
-            </a:r>
-            <a:r>
-              <a:rPr lang="ru-RU" dirty="0" smtClean="0"/>
-              <a:t>для ознакомления. </a:t>
+              <a:t>Анализ топ-5 клиентов по сумме продаж: для ознакомления. </a:t>
             </a:r>
           </a:p>
           <a:p>
@@ -14382,12 +14363,8 @@
               <a:buNone/>
             </a:pPr>
             <a:r>
-              <a:rPr lang="ru-RU" dirty="0" smtClean="0"/>
-              <a:t>Такие внушительные </a:t>
-            </a:r>
-            <a:r>
               <a:rPr lang="ru-RU" dirty="0"/>
-              <a:t>суммы говорят о наличие крупных корпоративных клиентов, активно покупающих на онлайн-</a:t>
+              <a:t>Такие внушительные суммы говорят о наличие крупных корпоративных клиентов, активно покупающих на онлайн-</a:t>
             </a:r>
             <a:r>
               <a:rPr lang="ru-RU" dirty="0" err="1"/>
@@ -14402,7 +14379,7 @@
               <a:t>млн.руб</a:t>
             </a:r>
             <a:r>
-              <a:rPr lang="ru-RU" dirty="0" smtClean="0"/>
+              <a:rPr lang="ru-RU" dirty="0"/>
               <a:t>.</a:t>
             </a:r>
           </a:p>
@@ -14411,16 +14388,15 @@
               <a:buNone/>
             </a:pPr>
             <a:r>
-              <a:rPr lang="ru-RU" dirty="0" smtClean="0"/>
+              <a:rPr lang="ru-RU" dirty="0"/>
               <a:t>Примечателен тот факт, что в таблицу ТОП-5 попали как активные, так и неактивные, и даже «уходящие клиенты» (150425). Это говорит о том, что каждая группа клиентов достойна своего внимания и инструментов воздействия.</a:t>
             </a:r>
+          </a:p>
+          <a:p>
+            <a:pPr marL="0" lvl="0" indent="0" algn="just">
+              <a:buNone/>
+            </a:pPr>
             <a:endParaRPr lang="ru-RU" dirty="0"/>
-          </a:p>
-          <a:p>
-            <a:pPr marL="0" lvl="0" indent="0" algn="just">
-              <a:buNone/>
-            </a:pPr>
-            <a:endParaRPr lang="ru-RU" dirty="0" smtClean="0"/>
           </a:p>
         </p:txBody>
       </p:sp>
@@ -14504,27 +14480,15 @@
               <a:buNone/>
             </a:pPr>
             <a:r>
-              <a:rPr lang="ru-RU" dirty="0" smtClean="0"/>
-              <a:t>Ознакомительная информация о состоянии продаж за месяц: </a:t>
-            </a:r>
-            <a:r>
               <a:rPr lang="ru-RU" dirty="0"/>
-              <a:t>количество клиентов за декабрь 2023 года </a:t>
-            </a:r>
-            <a:r>
-              <a:rPr lang="ru-RU" dirty="0" smtClean="0"/>
-              <a:t>- </a:t>
-            </a:r>
-            <a:r>
-              <a:rPr lang="ru-RU" dirty="0"/>
-              <a:t>167815 человек (что выше на 33,68% по сравнению с предыдущим месяцем), количество заказов за месяц 183624 (что выше на 36,81% по сравнению с предыдущим месяцем). Скорей всего рост связан с новогодними праздниками.</a:t>
+              <a:t>Ознакомительная информация о состоянии продаж за месяц: количество клиентов за декабрь 2023 года - 167815 человек (что выше на 33,68% по сравнению с предыдущим месяцем), количество заказов за месяц 183624 (что выше на 36,81% по сравнению с предыдущим месяцем). Скорей всего рост связан с новогодними праздниками.</a:t>
             </a:r>
           </a:p>
           <a:p>
             <a:pPr marL="0" lvl="0" indent="0" algn="just">
               <a:buNone/>
             </a:pPr>
-            <a:endParaRPr lang="ru-RU" dirty="0" smtClean="0"/>
+            <a:endParaRPr lang="ru-RU" dirty="0"/>
           </a:p>
         </p:txBody>
       </p:sp>
@@ -14609,22 +14573,14 @@
             </a:pPr>
             <a:r>
               <a:rPr lang="ru-RU" dirty="0"/>
-              <a:t>Динамика дневного посещения DAU за </a:t>
-            </a:r>
-            <a:r>
-              <a:rPr lang="ru-RU" dirty="0" smtClean="0"/>
-              <a:t>2023 год: </a:t>
-            </a:r>
-            <a:r>
-              <a:rPr lang="ru-RU" dirty="0"/>
-              <a:t>если смотреть на график целиком, без детального анализа пиков и провалов, то общий тренд действительно стабильный (нет явного роста или падения, слабый всплеск в сентябре, слабый провал в ноябре).</a:t>
+              <a:t>Динамика дневного посещения DAU за 2023 год: если смотреть на график целиком, без детального анализа пиков и провалов, то общий тренд действительно стабильный (нет явного роста или падения, слабый всплеск в сентябре, слабый провал в ноябре).</a:t>
             </a:r>
           </a:p>
           <a:p>
             <a:pPr marL="0" lvl="0" indent="0" algn="just">
               <a:buNone/>
             </a:pPr>
-            <a:endParaRPr lang="ru-RU" dirty="0" smtClean="0"/>
+            <a:endParaRPr lang="ru-RU" dirty="0"/>
           </a:p>
         </p:txBody>
       </p:sp>
@@ -14687,7 +14643,7 @@
           <p:cNvPr id="2" name="Заголовок 1">
             <a:extLst>
               <a:ext uri="{FF2B5EF4-FFF2-40B4-BE49-F238E27FC236}">
-                <a16:creationId xmlns="" xmlns:a16="http://schemas.microsoft.com/office/drawing/2014/main" id="{3C792A5A-C2DD-FA6E-B94A-61FEBB0A38B7}"/>
+                <a16:creationId xmlns:a16="http://schemas.microsoft.com/office/drawing/2014/main" id="{3C792A5A-C2DD-FA6E-B94A-61FEBB0A38B7}"/>
               </a:ext>
             </a:extLst>
           </p:cNvPr>
@@ -14713,11 +14669,7 @@
             <a:pPr algn="ctr"/>
             <a:r>
               <a:rPr lang="ru-RU" dirty="0"/>
-              <a:t>Анализ </a:t>
-            </a:r>
-            <a:r>
-              <a:rPr lang="ru-RU" dirty="0"/>
-              <a:t>клиентской базы</a:t>
+              <a:t>Анализ клиентской базы</a:t>
             </a:r>
           </a:p>
         </p:txBody>
@@ -14727,7 +14679,7 @@
           <p:cNvPr id="3" name="Объект 2">
             <a:extLst>
               <a:ext uri="{FF2B5EF4-FFF2-40B4-BE49-F238E27FC236}">
-                <a16:creationId xmlns="" xmlns:a16="http://schemas.microsoft.com/office/drawing/2014/main" id="{5DCFA8C6-8059-6DDE-BBE7-BD9C72B627A9}"/>
+                <a16:creationId xmlns:a16="http://schemas.microsoft.com/office/drawing/2014/main" id="{5DCFA8C6-8059-6DDE-BBE7-BD9C72B627A9}"/>
               </a:ext>
             </a:extLst>
           </p:cNvPr>
@@ -14754,20 +14706,8 @@
               <a:buNone/>
             </a:pPr>
             <a:r>
-              <a:rPr lang="ru-RU" dirty="0" smtClean="0"/>
-              <a:t>Это </a:t>
-            </a:r>
-            <a:r>
               <a:rPr lang="ru-RU" dirty="0"/>
-              <a:t>систематическое изучение </a:t>
-            </a:r>
-            <a:r>
-              <a:rPr lang="ru-RU" dirty="0" smtClean="0"/>
-              <a:t>клиентов </a:t>
-            </a:r>
-            <a:r>
-              <a:rPr lang="ru-RU" dirty="0"/>
-              <a:t>по разным срезам:</a:t>
+              <a:t>Это систематическое изучение клиентов по разным срезам:</a:t>
             </a:r>
           </a:p>
           <a:p>
@@ -14777,13 +14717,8 @@
             </a:r>
             <a:r>
               <a:rPr lang="ru-RU" dirty="0"/>
-              <a:t> (пол, возраст, география</a:t>
-            </a:r>
-            <a:r>
-              <a:rPr lang="ru-RU" dirty="0" smtClean="0"/>
-              <a:t>)?</a:t>
-            </a:r>
-            <a:endParaRPr lang="ru-RU" dirty="0"/>
+              <a:t> (пол, возраст, география)?</a:t>
+            </a:r>
           </a:p>
           <a:p>
             <a:r>
@@ -14792,13 +14727,8 @@
             </a:r>
             <a:r>
               <a:rPr lang="ru-RU" dirty="0"/>
-              <a:t> (частота, суммы, категории товаров</a:t>
-            </a:r>
-            <a:r>
-              <a:rPr lang="ru-RU" dirty="0" smtClean="0"/>
-              <a:t>)?</a:t>
-            </a:r>
-            <a:endParaRPr lang="ru-RU" dirty="0"/>
+              <a:t> (частота, суммы, категории товаров)?</a:t>
+            </a:r>
           </a:p>
           <a:p>
             <a:r>
@@ -14807,13 +14737,8 @@
             </a:r>
             <a:r>
               <a:rPr lang="ru-RU" dirty="0"/>
-              <a:t> (отток, давность последней покупки</a:t>
-            </a:r>
-            <a:r>
-              <a:rPr lang="ru-RU" dirty="0" smtClean="0"/>
-              <a:t>)?</a:t>
-            </a:r>
-            <a:endParaRPr lang="ru-RU" dirty="0"/>
+              <a:t> (отток, давность последней покупки)?</a:t>
+            </a:r>
           </a:p>
           <a:p>
             <a:r>
@@ -14822,25 +14747,16 @@
             </a:r>
             <a:r>
               <a:rPr lang="ru-RU" dirty="0"/>
-              <a:t> (LTV, средний чек</a:t>
-            </a:r>
-            <a:r>
-              <a:rPr lang="ru-RU" dirty="0" smtClean="0"/>
-              <a:t>)?</a:t>
-            </a:r>
-            <a:endParaRPr lang="ru-RU" dirty="0"/>
+              <a:t> (LTV, средний чек)?</a:t>
+            </a:r>
           </a:p>
           <a:p>
             <a:pPr marL="0" indent="0" algn="just">
               <a:buNone/>
             </a:pPr>
             <a:r>
-              <a:rPr lang="ru-RU" dirty="0" smtClean="0"/>
-              <a:t>Цель анализа  </a:t>
-            </a:r>
-            <a:r>
               <a:rPr lang="ru-RU" dirty="0"/>
-              <a:t>— </a:t>
+              <a:t>Цель анализа  — </a:t>
             </a:r>
             <a:r>
               <a:rPr lang="ru-RU" b="1" dirty="0"/>
@@ -14916,30 +14832,14 @@
             </a:pPr>
             <a:r>
               <a:rPr lang="ru-RU" dirty="0"/>
-              <a:t>Среднее-медиана MAU за </a:t>
-            </a:r>
-            <a:r>
-              <a:rPr lang="ru-RU" dirty="0" smtClean="0"/>
-              <a:t>2023 год: </a:t>
-            </a:r>
-            <a:r>
-              <a:rPr lang="ru-RU" dirty="0"/>
-              <a:t>медиана (156470) &gt; </a:t>
-            </a:r>
-            <a:r>
-              <a:rPr lang="ru-RU" dirty="0" smtClean="0"/>
-              <a:t>среднего </a:t>
-            </a:r>
-            <a:r>
-              <a:rPr lang="ru-RU" dirty="0"/>
-              <a:t>(153441) (распределение слегка левостороннее, отрицательная асимметрия), есть несколько низких месяцев, которые тянут среднее вниз, но нет явного тренда.</a:t>
+              <a:t>Среднее-медиана MAU за 2023 год: медиана (156470) &gt; среднего (153441) (распределение слегка левостороннее, отрицательная асимметрия), есть несколько низких месяцев, которые тянут среднее вниз, но нет явного тренда.</a:t>
             </a:r>
           </a:p>
           <a:p>
             <a:pPr marL="0" lvl="0" indent="0" algn="just">
               <a:buNone/>
             </a:pPr>
-            <a:endParaRPr lang="ru-RU" dirty="0" smtClean="0"/>
+            <a:endParaRPr lang="ru-RU" dirty="0"/>
           </a:p>
         </p:txBody>
       </p:sp>
@@ -15043,13 +14943,18 @@
               <a:rPr lang="ru-RU" dirty="0"/>
               <a:t>. руб.</a:t>
             </a:r>
-            <a:endParaRPr lang="ru-RU" dirty="0" smtClean="0"/>
           </a:p>
         </p:txBody>
       </p:sp>
       <p:pic>
         <p:nvPicPr>
-          <p:cNvPr id="2" name="Рисунок 1"/>
+          <p:cNvPr id="4" name="Рисунок 3">
+            <a:extLst>
+              <a:ext uri="{FF2B5EF4-FFF2-40B4-BE49-F238E27FC236}">
+                <a16:creationId xmlns:a16="http://schemas.microsoft.com/office/drawing/2014/main" id="{0E71E986-78BB-4394-B915-EF3BEB3F2A29}"/>
+              </a:ext>
+            </a:extLst>
+          </p:cNvPr>
           <p:cNvPicPr>
             <a:picLocks noChangeAspect="1"/>
           </p:cNvPicPr>
@@ -15063,8 +14968,8 @@
         </p:blipFill>
         <p:spPr>
           <a:xfrm>
-            <a:off x="1770868" y="4262829"/>
-            <a:ext cx="7848600" cy="2390775"/>
+            <a:off x="1451941" y="4193465"/>
+            <a:ext cx="8858250" cy="2321842"/>
           </a:xfrm>
           <a:prstGeom prst="rect">
             <a:avLst/>
@@ -15128,21 +15033,8 @@
             </a:pPr>
             <a:r>
               <a:rPr lang="ru-RU" dirty="0"/>
-              <a:t>Метрики LTV по гендерному признаку: обе аудитории одинаково прибыльны. Однако максимальный  LTV у мужчин (на ~3,2 млн выше). </a:t>
-            </a:r>
-            <a:r>
-              <a:rPr lang="ru-RU" dirty="0" smtClean="0"/>
-              <a:t>Таких </a:t>
-            </a:r>
-            <a:r>
-              <a:rPr lang="ru-RU" dirty="0"/>
-              <a:t>клиентов единицы, на среднюю статистику они не влияют. Нет необходимости разделять маркетинг по полу - оба сегмента одинаково ценны, инвестиции в привлечение мужчин и женщин должны быть равными. Медианный LTV (~1.33 млн) - хороший ориентир для окупаемости CAC</a:t>
-            </a:r>
-            <a:r>
-              <a:rPr lang="ru-RU" dirty="0" smtClean="0"/>
-              <a:t>.</a:t>
-            </a:r>
-            <a:endParaRPr lang="ru-RU" dirty="0"/>
+              <a:t>Метрики LTV по гендерному признаку: обе аудитории одинаково прибыльны. Однако максимальный  LTV у мужчин (на ~3,2 млн выше). Таких клиентов единицы, на среднюю статистику они не влияют. Нет необходимости разделять маркетинг по полу - оба сегмента одинаково ценны, инвестиции в привлечение мужчин и женщин должны быть равными. Медианный LTV (~1.33 млн) - хороший ориентир для окупаемости CAC.</a:t>
+            </a:r>
           </a:p>
         </p:txBody>
       </p:sp>
@@ -15226,36 +15118,8 @@
               <a:buNone/>
             </a:pPr>
             <a:r>
-              <a:rPr lang="ru-RU" dirty="0" smtClean="0"/>
-              <a:t>Однако</a:t>
-            </a:r>
-            <a:r>
               <a:rPr lang="ru-RU" dirty="0"/>
-              <a:t>, разброс LTV очень большой (0 – 21 млн). Т.е. есть сверхценные клиенты, которых нужно удерживать отдельно. Стандартное отклонение почти равно среднему </a:t>
-            </a:r>
-            <a:r>
-              <a:rPr lang="ru-RU" dirty="0"/>
-              <a:t> –</a:t>
-            </a:r>
-            <a:r>
-              <a:rPr lang="ru-RU" dirty="0" smtClean="0"/>
-              <a:t> </a:t>
-            </a:r>
-            <a:r>
-              <a:rPr lang="ru-RU" dirty="0"/>
-              <a:t>высокая неоднородность внутри каждого пола. Имеются нулевые LTV (возможно, возвраты) </a:t>
-            </a:r>
-            <a:r>
-              <a:rPr lang="ru-RU" dirty="0"/>
-              <a:t>–</a:t>
-            </a:r>
-            <a:r>
-              <a:rPr lang="ru-RU" dirty="0" smtClean="0"/>
-              <a:t> </a:t>
-            </a:r>
-            <a:r>
-              <a:rPr lang="ru-RU" dirty="0"/>
-              <a:t>если их много, это «мертвые» клиенты, которые тратили бюджет на привлечение впустую.</a:t>
+              <a:t>Однако, разброс LTV очень большой (0 – 21 млн). Т.е. есть сверхценные клиенты, которых нужно удерживать отдельно. Стандартное отклонение почти равно среднему  – высокая неоднородность внутри каждого пола. Имеются нулевые LTV (возможно, возвраты) – если их много, это «мертвые» клиенты, которые тратили бюджет на привлечение впустую.</a:t>
             </a:r>
           </a:p>
         </p:txBody>
@@ -15297,108 +15161,6 @@
 </p:sld>
 </file>
 
-<file path=ppt/slides/slide24.xml><?xml version="1.0" encoding="utf-8"?>
-<p:sld xmlns:a="http://schemas.openxmlformats.org/drawingml/2006/main" xmlns:r="http://schemas.openxmlformats.org/officeDocument/2006/relationships" xmlns:p="http://schemas.openxmlformats.org/presentationml/2006/main">
-  <p:cSld>
-    <p:spTree>
-      <p:nvGrpSpPr>
-        <p:cNvPr id="1" name=""/>
-        <p:cNvGrpSpPr/>
-        <p:nvPr/>
-      </p:nvGrpSpPr>
-      <p:grpSpPr>
-        <a:xfrm>
-          <a:off x="0" y="0"/>
-          <a:ext cx="0" cy="0"/>
-          <a:chOff x="0" y="0"/>
-          <a:chExt cx="0" cy="0"/>
-        </a:xfrm>
-      </p:grpSpPr>
-      <p:sp>
-        <p:nvSpPr>
-          <p:cNvPr id="3" name="Объект 2"/>
-          <p:cNvSpPr>
-            <a:spLocks noGrp="1"/>
-          </p:cNvSpPr>
-          <p:nvPr>
-            <p:ph idx="1"/>
-          </p:nvPr>
-        </p:nvSpPr>
-        <p:spPr>
-          <a:xfrm>
-            <a:off x="965570" y="488515"/>
-            <a:ext cx="10361070" cy="3519814"/>
-          </a:xfrm>
-        </p:spPr>
-        <p:txBody>
-          <a:bodyPr>
-            <a:normAutofit/>
-          </a:bodyPr>
-          <a:lstStyle/>
-          <a:p>
-            <a:pPr marL="0" lvl="0" indent="0" algn="just">
-              <a:buNone/>
-            </a:pPr>
-            <a:r>
-              <a:rPr lang="ru-RU" dirty="0"/>
-              <a:t>Топ-3 часа с пиковой нагрузкой за период (по рангу): данная информация в ознакомительных целях показывает самые загруженные часы </a:t>
-            </a:r>
-            <a:r>
-              <a:rPr lang="ru-RU" dirty="0" err="1"/>
-              <a:t>маркетплейса</a:t>
-            </a:r>
-            <a:r>
-              <a:rPr lang="ru-RU" dirty="0"/>
-              <a:t>, она необходима, например, для:  добавления мощностей серверов под пик (иначе сайт ляжет), экономии денег (не держать мощности 24/7), планирования тяжелых операций на реально свободное время (миграцию, </a:t>
-            </a:r>
-            <a:r>
-              <a:rPr lang="en-US" dirty="0"/>
-              <a:t>backup</a:t>
-            </a:r>
-            <a:r>
-              <a:rPr lang="ru-RU" dirty="0"/>
-              <a:t>).</a:t>
-            </a:r>
-          </a:p>
-        </p:txBody>
-      </p:sp>
-      <p:pic>
-        <p:nvPicPr>
-          <p:cNvPr id="4" name="Рисунок 3"/>
-          <p:cNvPicPr>
-            <a:picLocks noChangeAspect="1"/>
-          </p:cNvPicPr>
-          <p:nvPr/>
-        </p:nvPicPr>
-        <p:blipFill>
-          <a:blip r:embed="rId2"/>
-          <a:stretch>
-            <a:fillRect/>
-          </a:stretch>
-        </p:blipFill>
-        <p:spPr>
-          <a:xfrm>
-            <a:off x="4477794" y="3614934"/>
-            <a:ext cx="3086100" cy="1657350"/>
-          </a:xfrm>
-          <a:prstGeom prst="rect">
-            <a:avLst/>
-          </a:prstGeom>
-        </p:spPr>
-      </p:pic>
-    </p:spTree>
-    <p:extLst>
-      <p:ext uri="{BB962C8B-B14F-4D97-AF65-F5344CB8AC3E}">
-        <p14:creationId xmlns:p14="http://schemas.microsoft.com/office/powerpoint/2010/main" val="1420540698"/>
-      </p:ext>
-    </p:extLst>
-  </p:cSld>
-  <p:clrMapOvr>
-    <a:masterClrMapping/>
-  </p:clrMapOvr>
-</p:sld>
-</file>
-
 <file path=ppt/slides/slide3.xml><?xml version="1.0" encoding="utf-8"?>
 <p:sld xmlns:a="http://schemas.openxmlformats.org/drawingml/2006/main" xmlns:r="http://schemas.openxmlformats.org/officeDocument/2006/relationships" xmlns:p="http://schemas.openxmlformats.org/presentationml/2006/main">
   <p:cSld>
@@ -15421,7 +15183,7 @@
           <p:cNvPr id="2" name="Заголовок 1">
             <a:extLst>
               <a:ext uri="{FF2B5EF4-FFF2-40B4-BE49-F238E27FC236}">
-                <a16:creationId xmlns="" xmlns:a16="http://schemas.microsoft.com/office/drawing/2014/main" id="{3C792A5A-C2DD-FA6E-B94A-61FEBB0A38B7}"/>
+                <a16:creationId xmlns:a16="http://schemas.microsoft.com/office/drawing/2014/main" id="{3C792A5A-C2DD-FA6E-B94A-61FEBB0A38B7}"/>
               </a:ext>
             </a:extLst>
           </p:cNvPr>
@@ -15449,13 +15211,8 @@
             </a:r>
             <a:r>
               <a:rPr lang="ru-RU" dirty="0"/>
-              <a:t>-анализ клиентов</a:t>
-            </a:r>
-            <a:r>
-              <a:rPr lang="ru-RU" dirty="0" smtClean="0"/>
-              <a:t> </a:t>
-            </a:r>
-            <a:endParaRPr lang="ru-RU" dirty="0"/>
+              <a:t>-анализ клиентов </a:t>
+            </a:r>
           </a:p>
         </p:txBody>
       </p:sp>
@@ -15464,7 +15221,7 @@
           <p:cNvPr id="3" name="Объект 2">
             <a:extLst>
               <a:ext uri="{FF2B5EF4-FFF2-40B4-BE49-F238E27FC236}">
-                <a16:creationId xmlns="" xmlns:a16="http://schemas.microsoft.com/office/drawing/2014/main" id="{5DCFA8C6-8059-6DDE-BBE7-BD9C72B627A9}"/>
+                <a16:creationId xmlns:a16="http://schemas.microsoft.com/office/drawing/2014/main" id="{5DCFA8C6-8059-6DDE-BBE7-BD9C72B627A9}"/>
               </a:ext>
             </a:extLst>
           </p:cNvPr>
@@ -15491,48 +15248,20 @@
               <a:buNone/>
             </a:pPr>
             <a:r>
-              <a:rPr lang="en-US" dirty="0" smtClean="0"/>
+              <a:rPr lang="en-US" dirty="0"/>
               <a:t>RFM-</a:t>
             </a:r>
             <a:r>
-              <a:rPr lang="ru-RU" dirty="0" smtClean="0"/>
-              <a:t>анализ </a:t>
-            </a:r>
-            <a:r>
-              <a:rPr lang="ru-RU" dirty="0" smtClean="0"/>
-              <a:t>клиентов </a:t>
-            </a:r>
-            <a:r>
               <a:rPr lang="ru-RU" dirty="0"/>
-              <a:t>— </a:t>
-            </a:r>
-            <a:r>
-              <a:rPr lang="ru-RU" dirty="0" smtClean="0"/>
-              <a:t>это </a:t>
-            </a:r>
+              <a:t>анализ клиентов — это метод сегментации клиентов, который помогает понять, кто из клиентов самый ценный, а кто «спит» или ушёл.</a:t>
+            </a:r>
+          </a:p>
+          <a:p>
+            <a:pPr marL="0" indent="0" algn="just">
+              <a:buNone/>
+            </a:pPr>
             <a:r>
               <a:rPr lang="ru-RU" dirty="0"/>
-              <a:t>метод сегментации клиентов, который помогает понять, кто из </a:t>
-            </a:r>
-            <a:r>
-              <a:rPr lang="ru-RU" dirty="0" smtClean="0"/>
-              <a:t>клиентов </a:t>
-            </a:r>
-            <a:r>
-              <a:rPr lang="ru-RU" dirty="0"/>
-              <a:t>самый ценный, а кто «спит» или ушёл</a:t>
-            </a:r>
-            <a:r>
-              <a:rPr lang="ru-RU" dirty="0" smtClean="0"/>
-              <a:t>.</a:t>
-            </a:r>
-          </a:p>
-          <a:p>
-            <a:pPr marL="0" indent="0" algn="just">
-              <a:buNone/>
-            </a:pPr>
-            <a:r>
-              <a:rPr lang="ru-RU" dirty="0" smtClean="0"/>
               <a:t>Метрики анализа:</a:t>
             </a:r>
           </a:p>
@@ -15551,14 +15280,10 @@
             </a:r>
             <a:r>
               <a:rPr lang="ru-RU" dirty="0"/>
-              <a:t> — </a:t>
-            </a:r>
-            <a:r>
-              <a:rPr lang="ru-RU" dirty="0" smtClean="0"/>
-              <a:t>д</a:t>
-            </a:r>
-            <a:r>
-              <a:rPr lang="ru-RU" b="1" dirty="0" smtClean="0"/>
+              <a:t> — д</a:t>
+            </a:r>
+            <a:r>
+              <a:rPr lang="ru-RU" b="1" dirty="0"/>
               <a:t>авность</a:t>
             </a:r>
             <a:r>
@@ -15581,14 +15306,10 @@
             </a:r>
             <a:r>
               <a:rPr lang="ru-RU" dirty="0"/>
-              <a:t> — </a:t>
-            </a:r>
-            <a:r>
-              <a:rPr lang="ru-RU" dirty="0"/>
-              <a:t>ч</a:t>
-            </a:r>
-            <a:r>
-              <a:rPr lang="ru-RU" b="1" dirty="0" smtClean="0"/>
+              <a:t> — ч</a:t>
+            </a:r>
+            <a:r>
+              <a:rPr lang="ru-RU" b="1" dirty="0"/>
               <a:t>астота</a:t>
             </a:r>
             <a:r>
@@ -15615,11 +15336,7 @@
             </a:r>
             <a:r>
               <a:rPr lang="ru-RU" b="1" dirty="0"/>
-              <a:t>д</a:t>
-            </a:r>
-            <a:r>
-              <a:rPr lang="ru-RU" b="1" dirty="0" smtClean="0"/>
-              <a:t>еньги</a:t>
+              <a:t>деньги</a:t>
             </a:r>
             <a:r>
               <a:rPr lang="ru-RU" dirty="0"/>
@@ -15708,29 +15425,16 @@
             </a:r>
             <a:r>
               <a:rPr lang="ru-RU" dirty="0"/>
-              <a:t> </a:t>
-            </a:r>
-            <a:r>
-              <a:rPr lang="ru-RU" dirty="0" smtClean="0"/>
-              <a:t>показывает </a:t>
-            </a:r>
+              <a:t> показывает распределение пользователей по  количеству дней с момента последней покупки. </a:t>
+            </a:r>
+          </a:p>
+          <a:p>
+            <a:pPr marL="0" indent="0" algn="just">
+              <a:buNone/>
+            </a:pPr>
             <a:r>
               <a:rPr lang="ru-RU" dirty="0"/>
-              <a:t>распределение пользователей по  количеству дней с момента последней покупки. </a:t>
-            </a:r>
-            <a:endParaRPr lang="ru-RU" dirty="0" smtClean="0"/>
-          </a:p>
-          <a:p>
-            <a:pPr marL="0" indent="0" algn="just">
-              <a:buNone/>
-            </a:pPr>
-            <a:r>
-              <a:rPr lang="ru-RU" dirty="0" smtClean="0"/>
-              <a:t>При </a:t>
-            </a:r>
-            <a:r>
-              <a:rPr lang="ru-RU" dirty="0"/>
-              <a:t>разделении графика </a:t>
+              <a:t>При разделении графика </a:t>
             </a:r>
             <a:r>
               <a:rPr lang="en-US" dirty="0" err="1"/>
@@ -15758,16 +15462,8 @@
               <a:buNone/>
             </a:pPr>
             <a:r>
-              <a:rPr lang="ru-RU" dirty="0" smtClean="0"/>
-              <a:t>Плавный </a:t>
-            </a:r>
-            <a:r>
               <a:rPr lang="ru-RU" dirty="0"/>
-              <a:t>спад от 1 до 361 дня без резких скачков говорит о том, что клиенты уходят постепенно</a:t>
-            </a:r>
-            <a:r>
-              <a:rPr lang="ru-RU" dirty="0" smtClean="0"/>
-              <a:t>.</a:t>
+              <a:t>Плавный спад от 1 до 361 дня без резких скачков говорит о том, что клиенты уходят постепенно.</a:t>
             </a:r>
           </a:p>
           <a:p>
@@ -15783,7 +15479,13 @@
       </p:sp>
       <p:pic>
         <p:nvPicPr>
-          <p:cNvPr id="4" name="Рисунок 3"/>
+          <p:cNvPr id="2" name="Рисунок 1">
+            <a:extLst>
+              <a:ext uri="{FF2B5EF4-FFF2-40B4-BE49-F238E27FC236}">
+                <a16:creationId xmlns:a16="http://schemas.microsoft.com/office/drawing/2014/main" id="{7017833D-27EC-4632-8FBA-2E3E8ED44DAC}"/>
+              </a:ext>
+            </a:extLst>
+          </p:cNvPr>
           <p:cNvPicPr>
             <a:picLocks noChangeAspect="1"/>
           </p:cNvPicPr>
@@ -15797,8 +15499,8 @@
         </p:blipFill>
         <p:spPr>
           <a:xfrm>
-            <a:off x="2096063" y="3181610"/>
-            <a:ext cx="7746173" cy="3362781"/>
+            <a:off x="4078978" y="3429000"/>
+            <a:ext cx="4034044" cy="3160361"/>
           </a:xfrm>
           <a:prstGeom prst="rect">
             <a:avLst/>
@@ -15865,30 +15567,21 @@
               <a:t>График </a:t>
             </a:r>
             <a:r>
-              <a:rPr lang="ru-RU" dirty="0" err="1" smtClean="0"/>
+              <a:rPr lang="ru-RU" dirty="0" err="1"/>
               <a:t>Frequency</a:t>
             </a:r>
             <a:r>
-              <a:rPr lang="ru-RU" dirty="0" smtClean="0"/>
-              <a:t> показывает </a:t>
-            </a:r>
-            <a:r>
               <a:rPr lang="ru-RU" dirty="0"/>
-              <a:t>распределение пользователей по  количеству покупок.  Большинство клиентов делают 1-2 покупки. </a:t>
-            </a:r>
-            <a:endParaRPr lang="ru-RU" dirty="0" smtClean="0"/>
+              <a:t> показывает распределение пользователей по  количеству покупок.  Большинство клиентов делают 1-2 покупки. </a:t>
+            </a:r>
           </a:p>
           <a:p>
             <a:pPr marL="0" indent="0" algn="just">
               <a:buNone/>
             </a:pPr>
             <a:r>
-              <a:rPr lang="ru-RU" dirty="0" smtClean="0"/>
-              <a:t>При </a:t>
-            </a:r>
-            <a:r>
               <a:rPr lang="ru-RU" dirty="0"/>
-              <a:t>разделении графика </a:t>
+              <a:t>При разделении графика </a:t>
             </a:r>
             <a:r>
               <a:rPr lang="en-US" dirty="0" err="1"/>
@@ -15916,20 +15609,8 @@
               <a:buNone/>
             </a:pPr>
             <a:r>
-              <a:rPr lang="ru-RU" dirty="0" smtClean="0"/>
-              <a:t>Для </a:t>
-            </a:r>
-            <a:r>
               <a:rPr lang="ru-RU" dirty="0"/>
-              <a:t>повышения частоты покупок рекомендуется фокусироваться на переходе клиентов из группы с </a:t>
-            </a:r>
-            <a:r>
-              <a:rPr lang="ru-RU" dirty="0" smtClean="0"/>
-              <a:t>2-я </a:t>
-            </a:r>
-            <a:r>
-              <a:rPr lang="ru-RU" dirty="0"/>
-              <a:t>покупками в группу с 3-я покупками.</a:t>
+              <a:t>Для повышения частоты покупок рекомендуется фокусироваться на переходе клиентов из группы с 2-я покупками в группу с 3-я покупками.</a:t>
             </a:r>
           </a:p>
           <a:p>
@@ -15945,7 +15626,13 @@
       </p:sp>
       <p:pic>
         <p:nvPicPr>
-          <p:cNvPr id="2" name="Рисунок 1"/>
+          <p:cNvPr id="4" name="Рисунок 3">
+            <a:extLst>
+              <a:ext uri="{FF2B5EF4-FFF2-40B4-BE49-F238E27FC236}">
+                <a16:creationId xmlns:a16="http://schemas.microsoft.com/office/drawing/2014/main" id="{F36E0075-992E-4CB7-95DC-E82BB87311C5}"/>
+              </a:ext>
+            </a:extLst>
+          </p:cNvPr>
           <p:cNvPicPr>
             <a:picLocks noChangeAspect="1"/>
           </p:cNvPicPr>
@@ -15959,8 +15646,8 @@
         </p:blipFill>
         <p:spPr>
           <a:xfrm>
-            <a:off x="3253872" y="3544865"/>
-            <a:ext cx="5430555" cy="2943616"/>
+            <a:off x="4129294" y="3430984"/>
+            <a:ext cx="4087053" cy="3190961"/>
           </a:xfrm>
           <a:prstGeom prst="rect">
             <a:avLst/>
@@ -16023,24 +15710,16 @@
               <a:buNone/>
             </a:pPr>
             <a:r>
-              <a:rPr lang="ru-RU" dirty="0" smtClean="0"/>
+              <a:rPr lang="ru-RU" dirty="0"/>
               <a:t>График </a:t>
             </a:r>
             <a:r>
-              <a:rPr lang="ru-RU" dirty="0" err="1" smtClean="0"/>
+              <a:rPr lang="ru-RU" dirty="0" err="1"/>
               <a:t>Monetary</a:t>
             </a:r>
             <a:r>
-              <a:rPr lang="ru-RU" dirty="0" smtClean="0"/>
-              <a:t> показывает </a:t>
-            </a:r>
-            <a:r>
               <a:rPr lang="ru-RU" dirty="0"/>
-              <a:t>распределение пользователей по  общей сумме </a:t>
-            </a:r>
-            <a:r>
-              <a:rPr lang="ru-RU" dirty="0" smtClean="0"/>
-              <a:t>покупок.</a:t>
+              <a:t> показывает распределение пользователей по  общей сумме покупок.</a:t>
             </a:r>
           </a:p>
           <a:p>
@@ -16085,12 +15764,8 @@
               <a:buNone/>
             </a:pPr>
             <a:r>
-              <a:rPr lang="ru-RU" dirty="0" smtClean="0"/>
-              <a:t>Пик</a:t>
-            </a:r>
-            <a:r>
               <a:rPr lang="ru-RU" dirty="0"/>
-              <a:t> в самом левом диапазоне (маленькие чеки), длинный хвост вправо (очень мало крупных клиентов), асимметрия - большинство тратит мало, редкие – много.</a:t>
+              <a:t>Пик в самом левом диапазоне (маленькие чеки), длинный хвост вправо (очень мало крупных клиентов), асимметрия - большинство тратит мало, редкие – много.</a:t>
             </a:r>
           </a:p>
           <a:p>
@@ -16099,19 +15774,20 @@
             </a:pPr>
             <a:r>
               <a:rPr lang="ru-RU" dirty="0"/>
-              <a:t>Для роста выручки рекомендуется: подтягивать клиентов из левой части распределения вправо,  удерживать крупных клиентов из правого хвоста (программа лояльности, персональный менеджер), привлекать новых клиентов, способных тратить выше среднего</a:t>
-            </a:r>
-            <a:r>
-              <a:rPr lang="ru-RU" dirty="0" smtClean="0"/>
-              <a:t>.</a:t>
-            </a:r>
-            <a:endParaRPr lang="ru-RU" dirty="0"/>
+              <a:t>Для роста выручки рекомендуется: подтягивать клиентов из левой части распределения вправо,  удерживать крупных клиентов из правого хвоста (программа лояльности, персональный менеджер), привлекать новых клиентов, способных тратить выше среднего.</a:t>
+            </a:r>
           </a:p>
         </p:txBody>
       </p:sp>
       <p:pic>
         <p:nvPicPr>
-          <p:cNvPr id="4" name="Рисунок 3"/>
+          <p:cNvPr id="2" name="Рисунок 1">
+            <a:extLst>
+              <a:ext uri="{FF2B5EF4-FFF2-40B4-BE49-F238E27FC236}">
+                <a16:creationId xmlns:a16="http://schemas.microsoft.com/office/drawing/2014/main" id="{06F8E475-F4E6-4847-95CF-2094C18A0D47}"/>
+              </a:ext>
+            </a:extLst>
+          </p:cNvPr>
           <p:cNvPicPr>
             <a:picLocks noChangeAspect="1"/>
           </p:cNvPicPr>
@@ -16125,8 +15801,8 @@
         </p:blipFill>
         <p:spPr>
           <a:xfrm>
-            <a:off x="1629448" y="4384110"/>
-            <a:ext cx="9134475" cy="2367223"/>
+            <a:off x="4319588" y="4340388"/>
+            <a:ext cx="3260656" cy="2517611"/>
           </a:xfrm>
           <a:prstGeom prst="rect">
             <a:avLst/>
@@ -16189,30 +15865,27 @@
               <a:buNone/>
             </a:pPr>
             <a:r>
-              <a:rPr lang="ru-RU" dirty="0" smtClean="0"/>
-              <a:t>В таблице RFM-анализа дополнительно рассчитывается </a:t>
-            </a:r>
-            <a:r>
               <a:rPr lang="ru-RU" dirty="0"/>
-              <a:t>LTV клиента за все время. </a:t>
-            </a:r>
-            <a:r>
-              <a:rPr lang="ru-RU" dirty="0" smtClean="0"/>
-              <a:t>Здесь можно проанализировать каждого клиента.</a:t>
-            </a:r>
+              <a:t>В таблице RFM-анализа дополнительно рассчитывается LTV клиента за все время. Здесь можно проанализировать каждого клиента.</a:t>
+            </a:r>
+          </a:p>
+          <a:p>
+            <a:pPr marL="0" lvl="0" indent="0" algn="just">
+              <a:buNone/>
+            </a:pPr>
             <a:endParaRPr lang="ru-RU" dirty="0"/>
-          </a:p>
-          <a:p>
-            <a:pPr marL="0" lvl="0" indent="0" algn="just">
-              <a:buNone/>
-            </a:pPr>
-            <a:endParaRPr lang="ru-RU" dirty="0" smtClean="0"/>
           </a:p>
         </p:txBody>
       </p:sp>
       <p:pic>
         <p:nvPicPr>
-          <p:cNvPr id="2" name="Рисунок 1"/>
+          <p:cNvPr id="4" name="Рисунок 3">
+            <a:extLst>
+              <a:ext uri="{FF2B5EF4-FFF2-40B4-BE49-F238E27FC236}">
+                <a16:creationId xmlns:a16="http://schemas.microsoft.com/office/drawing/2014/main" id="{93709BF3-207B-4328-884A-DCEA613E5879}"/>
+              </a:ext>
+            </a:extLst>
+          </p:cNvPr>
           <p:cNvPicPr>
             <a:picLocks noChangeAspect="1"/>
           </p:cNvPicPr>
@@ -16226,8 +15899,8 @@
         </p:blipFill>
         <p:spPr>
           <a:xfrm>
-            <a:off x="1147045" y="1991638"/>
-            <a:ext cx="9772650" cy="3552825"/>
+            <a:off x="804515" y="2118277"/>
+            <a:ext cx="10534650" cy="3867150"/>
           </a:xfrm>
           <a:prstGeom prst="rect">
             <a:avLst/>
@@ -16290,12 +15963,8 @@
               <a:buNone/>
             </a:pPr>
             <a:r>
-              <a:rPr lang="ru-RU" dirty="0" smtClean="0"/>
-              <a:t>Основные </a:t>
-            </a:r>
-            <a:r>
               <a:rPr lang="ru-RU" dirty="0"/>
-              <a:t>гипотезы при анализе клиентской базы </a:t>
+              <a:t>Основные гипотезы при анализе клиентской базы </a:t>
             </a:r>
             <a:r>
               <a:rPr lang="ru-RU" b="1" dirty="0"/>
@@ -16314,15 +15983,7 @@
             <a:pPr lvl="0" algn="just"/>
             <a:r>
               <a:rPr lang="ru-RU" dirty="0"/>
-              <a:t>В клиентской базе существуют как лояльные клиенты, так и «разовые». Поэтому клиентская база </a:t>
-            </a:r>
-            <a:r>
-              <a:rPr lang="ru-RU" dirty="0" smtClean="0"/>
-              <a:t>нуждается </a:t>
-            </a:r>
-            <a:r>
-              <a:rPr lang="ru-RU" dirty="0"/>
-              <a:t>в сегментации для разработки </a:t>
+              <a:t>В клиентской базе существуют как лояльные клиенты, так и «разовые». Поэтому клиентская база нуждается в сегментации для разработки </a:t>
             </a:r>
             <a:r>
               <a:rPr lang="ru-RU" dirty="0" err="1"/>
@@ -16337,15 +15998,7 @@
             <a:pPr lvl="0" algn="just"/>
             <a:r>
               <a:rPr lang="ru-RU" dirty="0"/>
-              <a:t>Определение списка ключевых клиентов, приносящих </a:t>
-            </a:r>
-            <a:r>
-              <a:rPr lang="ru-RU" dirty="0" smtClean="0"/>
-              <a:t>большую </a:t>
-            </a:r>
-            <a:r>
-              <a:rPr lang="ru-RU" dirty="0"/>
-              <a:t>часть прибыли, необходимо для активного развития и вовлечения их в дальнейшее взаимодействие, для максимального удержания. Здесь имеет смысл стимулировать клиентов нематериальными бонусами: приглашать на мероприятия, бесплатно присылать полезные экспертные материалы.</a:t>
+              <a:t>Определение списка ключевых клиентов, приносящих большую часть прибыли, необходимо для активного развития и вовлечения их в дальнейшее взаимодействие, для максимального удержания. Здесь имеет смысл стимулировать клиентов нематериальными бонусами: приглашать на мероприятия, бесплатно присылать полезные экспертные материалы.</a:t>
             </a:r>
           </a:p>
           <a:p>
@@ -16359,10 +16012,9 @@
               <a:t>промокоды</a:t>
             </a:r>
             <a:r>
-              <a:rPr lang="ru-RU" dirty="0" smtClean="0"/>
+              <a:rPr lang="ru-RU" dirty="0"/>
               <a:t>.</a:t>
             </a:r>
-            <a:endParaRPr lang="ru-RU" dirty="0"/>
           </a:p>
         </p:txBody>
       </p:sp>
@@ -16420,27 +16072,15 @@
           <a:p>
             <a:pPr lvl="0" algn="just"/>
             <a:r>
-              <a:rPr lang="ru-RU" dirty="0" smtClean="0"/>
-              <a:t>Определение </a:t>
-            </a:r>
-            <a:r>
               <a:rPr lang="ru-RU" dirty="0"/>
-              <a:t>списка клиентов, совершавших редко крупные покупки, необходимо для их мотивации. Здесь можно ограничиваемся стандартными рассылками или звонками.</a:t>
+              <a:t>Определение списка клиентов, совершавших редко крупные покупки, необходимо для их мотивации. Здесь можно ограничиваемся стандартными рассылками или звонками.</a:t>
             </a:r>
           </a:p>
           <a:p>
             <a:pPr lvl="0" algn="just"/>
             <a:r>
               <a:rPr lang="ru-RU" dirty="0"/>
-              <a:t>Определение списка бесперспективных клиентов, совершавших давно и нечасто небольшие покупки, необходимо для того, чтобы не тратить на них большого количества ресурсов. Здесь целесообразно </a:t>
-            </a:r>
-            <a:r>
-              <a:rPr lang="ru-RU" dirty="0" smtClean="0"/>
-              <a:t>использовать </a:t>
-            </a:r>
-            <a:r>
-              <a:rPr lang="ru-RU" dirty="0"/>
-              <a:t>низкобюджетные попытки активировать их с помощью бонусных баллов, </a:t>
+              <a:t>Определение списка бесперспективных клиентов, совершавших давно и нечасто небольшие покупки, необходимо для того, чтобы не тратить на них большого количества ресурсов. Здесь целесообразно использовать низкобюджетные попытки активировать их с помощью бонусных баллов, </a:t>
             </a:r>
             <a:r>
               <a:rPr lang="ru-RU" dirty="0" err="1"/>
@@ -16455,13 +16095,8 @@
             <a:pPr lvl="0" algn="just"/>
             <a:r>
               <a:rPr lang="ru-RU" dirty="0"/>
-              <a:t>Определение списка клиентов промежуточных категорий также позволит выявить стратегии для работы с ними (акция, звонок, опрос, рассылка и прочее</a:t>
-            </a:r>
-            <a:r>
-              <a:rPr lang="ru-RU" dirty="0" smtClean="0"/>
-              <a:t>).</a:t>
-            </a:r>
-            <a:endParaRPr lang="ru-RU" dirty="0"/>
+              <a:t>Определение списка клиентов промежуточных категорий также позволит выявить стратегии для работы с ними (акция, звонок, опрос, рассылка и прочее).</a:t>
+            </a:r>
           </a:p>
         </p:txBody>
       </p:sp>
